--- a/Bases de Datos II/Clases/Clase 12 - Integracion y preparacion final/Presentacion.pptx
+++ b/Bases de Datos II/Clases/Clase 12 - Integracion y preparacion final/Presentacion.pptx
@@ -20,8 +20,6 @@
     <p:sldId id="268" r:id="rId19"/>
     <p:sldId id="269" r:id="rId20"/>
     <p:sldId id="270" r:id="rId21"/>
-    <p:sldId id="271" r:id="rId22"/>
-    <p:sldId id="272" r:id="rId23"/>
   </p:sldIdLst>
   <p:sldSz cx="12191695" cy="6858000" type="screen4x3"/>
   <p:notesSz cx="6858000" cy="9144000"/>
@@ -6112,1017 +6110,6 @@
         <p:spPr>
           <a:xfrm>
             <a:off x="0" y="0"/>
-            <a:ext cx="12191695" cy="1170432"/>
-          </a:xfrm>
-          <a:prstGeom prst="rect">
-            <a:avLst/>
-          </a:prstGeom>
-          <a:solidFill>
-            <a:srgbClr val="095292"/>
-          </a:solidFill>
-          <a:ln>
-            <a:noFill/>
-          </a:ln>
-        </p:spPr>
-        <p:style>
-          <a:lnRef idx="1">
-            <a:schemeClr val="accent1"/>
-          </a:lnRef>
-          <a:fillRef idx="3">
-            <a:schemeClr val="accent1"/>
-          </a:fillRef>
-          <a:effectRef idx="2">
-            <a:schemeClr val="accent1"/>
-          </a:effectRef>
-          <a:fontRef idx="minor">
-            <a:schemeClr val="lt1"/>
-          </a:fontRef>
-        </p:style>
-        <p:txBody>
-          <a:bodyPr rtlCol="0" anchor="ctr"/>
-          <a:lstStyle/>
-          <a:p>
-            <a:pPr algn="ctr"/>
-          </a:p>
-        </p:txBody>
-      </p:sp>
-      <p:sp>
-        <p:nvSpPr>
-          <p:cNvPr id="3" name="Rectangle 2"/>
-          <p:cNvSpPr/>
-          <p:nvPr/>
-        </p:nvSpPr>
-        <p:spPr>
-          <a:xfrm>
-            <a:off x="0" y="1170432"/>
-            <a:ext cx="12191695" cy="41148"/>
-          </a:xfrm>
-          <a:prstGeom prst="rect">
-            <a:avLst/>
-          </a:prstGeom>
-          <a:solidFill>
-            <a:srgbClr val="FFD000"/>
-          </a:solidFill>
-          <a:ln>
-            <a:noFill/>
-          </a:ln>
-        </p:spPr>
-        <p:style>
-          <a:lnRef idx="1">
-            <a:schemeClr val="accent1"/>
-          </a:lnRef>
-          <a:fillRef idx="3">
-            <a:schemeClr val="accent1"/>
-          </a:fillRef>
-          <a:effectRef idx="2">
-            <a:schemeClr val="accent1"/>
-          </a:effectRef>
-          <a:fontRef idx="minor">
-            <a:schemeClr val="lt1"/>
-          </a:fontRef>
-        </p:style>
-        <p:txBody>
-          <a:bodyPr rtlCol="0" anchor="ctr"/>
-          <a:lstStyle/>
-          <a:p>
-            <a:pPr algn="ctr"/>
-          </a:p>
-        </p:txBody>
-      </p:sp>
-      <p:sp>
-        <p:nvSpPr>
-          <p:cNvPr id="4" name="TextBox 3"/>
-          <p:cNvSpPr txBox="1"/>
-          <p:nvPr/>
-        </p:nvSpPr>
-        <p:spPr>
-          <a:xfrm>
-            <a:off x="457200" y="164592"/>
-            <a:ext cx="11277295" cy="384048"/>
-          </a:xfrm>
-          <a:prstGeom prst="rect">
-            <a:avLst/>
-          </a:prstGeom>
-          <a:noFill/>
-        </p:spPr>
-        <p:txBody>
-          <a:bodyPr wrap="square">
-            <a:spAutoFit/>
-          </a:bodyPr>
-          <a:lstStyle/>
-          <a:p>
-            <a:r>
-              <a:rPr sz="2600" b="1" i="0">
-                <a:solidFill>
-                  <a:srgbClr val="FFFFFF"/>
-                </a:solidFill>
-                <a:latin typeface="Calibri"/>
-              </a:rPr>
-              <a:t>Quiz rapido (cierre)</a:t>
-            </a:r>
-          </a:p>
-        </p:txBody>
-      </p:sp>
-      <p:sp>
-        <p:nvSpPr>
-          <p:cNvPr id="5" name="TextBox 4"/>
-          <p:cNvSpPr txBox="1"/>
-          <p:nvPr/>
-        </p:nvSpPr>
-        <p:spPr>
-          <a:xfrm>
-            <a:off x="457200" y="566928"/>
-            <a:ext cx="11277295" cy="411480"/>
-          </a:xfrm>
-          <a:prstGeom prst="rect">
-            <a:avLst/>
-          </a:prstGeom>
-          <a:noFill/>
-        </p:spPr>
-        <p:txBody>
-          <a:bodyPr wrap="square">
-            <a:spAutoFit/>
-          </a:bodyPr>
-          <a:lstStyle/>
-          <a:p>
-            <a:r>
-              <a:rPr sz="1400" b="0" i="0">
-                <a:solidFill>
-                  <a:srgbClr val="B8D8EE"/>
-                </a:solidFill>
-                <a:latin typeface="Calibri"/>
-              </a:rPr>
-              <a:t>Individual · 8–10 min</a:t>
-            </a:r>
-          </a:p>
-        </p:txBody>
-      </p:sp>
-      <p:sp>
-        <p:nvSpPr>
-          <p:cNvPr id="6" name="TextBox 5"/>
-          <p:cNvSpPr txBox="1"/>
-          <p:nvPr/>
-        </p:nvSpPr>
-        <p:spPr>
-          <a:xfrm>
-            <a:off x="457200" y="1380744"/>
-            <a:ext cx="11277295" cy="5020056"/>
-          </a:xfrm>
-          <a:prstGeom prst="rect">
-            <a:avLst/>
-          </a:prstGeom>
-          <a:noFill/>
-        </p:spPr>
-        <p:txBody>
-          <a:bodyPr wrap="square">
-            <a:spAutoFit/>
-          </a:bodyPr>
-          <a:lstStyle/>
-          <a:p>
-            <a:pPr>
-              <a:spcAft>
-                <a:spcPts val="800"/>
-              </a:spcAft>
-            </a:pPr>
-            <a:r>
-              <a:rPr sz="1200" b="1" i="0">
-                <a:solidFill>
-                  <a:srgbClr val="333333"/>
-                </a:solidFill>
-                <a:latin typeface="Calibri"/>
-              </a:rPr>
-              <a:t>1.</a:t>
-            </a:r>
-            <a:r>
-              <a:rPr sz="1200" b="0" i="0">
-                <a:solidFill>
-                  <a:srgbClr val="333333"/>
-                </a:solidFill>
-                <a:latin typeface="Calibri"/>
-              </a:rPr>
-              <a:t> El contrato app↔BD es:</a:t>
-            </a:r>
-          </a:p>
-          <a:p>
-            <a:pPr>
-              <a:spcAft>
-                <a:spcPts val="800"/>
-              </a:spcAft>
-            </a:pPr>
-            <a:r>
-              <a:rPr sz="1200" b="0" i="0">
-                <a:solidFill>
-                  <a:srgbClr val="333333"/>
-                </a:solidFill>
-                <a:latin typeface="Calibri"/>
-              </a:rPr>
-              <a:t>–   ('A) Un meme', 1)</a:t>
-            </a:r>
-          </a:p>
-          <a:p>
-            <a:pPr>
-              <a:spcAft>
-                <a:spcPts val="800"/>
-              </a:spcAft>
-            </a:pPr>
-            <a:r>
-              <a:rPr sz="1200" b="0" i="0">
-                <a:solidFill>
-                  <a:srgbClr val="333333"/>
-                </a:solidFill>
-                <a:latin typeface="Calibri"/>
-              </a:rPr>
-              <a:t>–   ('B) Lista de operaciones (procs), parámetros, errores y ejemplos', 1)</a:t>
-            </a:r>
-          </a:p>
-          <a:p>
-            <a:pPr>
-              <a:spcAft>
-                <a:spcPts val="800"/>
-              </a:spcAft>
-            </a:pPr>
-            <a:r>
-              <a:rPr sz="1200" b="0" i="0">
-                <a:solidFill>
-                  <a:srgbClr val="333333"/>
-                </a:solidFill>
-                <a:latin typeface="Calibri"/>
-              </a:rPr>
-              <a:t>–   ('C) Solo el ER sin operaciones', 1)</a:t>
-            </a:r>
-          </a:p>
-          <a:p>
-            <a:pPr>
-              <a:spcAft>
-                <a:spcPts val="800"/>
-              </a:spcAft>
-            </a:pPr>
-            <a:r>
-              <a:rPr sz="1200" b="0" i="0">
-                <a:solidFill>
-                  <a:srgbClr val="333333"/>
-                </a:solidFill>
-                <a:latin typeface="Calibri"/>
-              </a:rPr>
-              <a:t>–   ('D) La nota del parcial', 1)</a:t>
-            </a:r>
-          </a:p>
-          <a:p>
-            <a:pPr>
-              <a:spcAft>
-                <a:spcPts val="800"/>
-              </a:spcAft>
-            </a:pPr>
-            <a:r>
-              <a:rPr sz="1200" b="0" i="0">
-                <a:solidFill>
-                  <a:srgbClr val="333333"/>
-                </a:solidFill>
-                <a:latin typeface="Calibri"/>
-              </a:rPr>
-              <a:t>–   </a:t>
-            </a:r>
-            <a:r>
-              <a:rPr sz="1200" b="1" i="0">
-                <a:solidFill>
-                  <a:srgbClr val="333333"/>
-                </a:solidFill>
-                <a:latin typeface="Calibri"/>
-              </a:rPr>
-              <a:t>2.</a:t>
-            </a:r>
-            <a:r>
-              <a:rPr sz="1200" b="0" i="0">
-                <a:solidFill>
-                  <a:srgbClr val="333333"/>
-                </a:solidFill>
-                <a:latin typeface="Calibri"/>
-              </a:rPr>
-              <a:t> ¿Por qué la app no debe hacer SQL suelto de negocio?</a:t>
-            </a:r>
-          </a:p>
-          <a:p>
-            <a:pPr>
-              <a:spcAft>
-                <a:spcPts val="800"/>
-              </a:spcAft>
-            </a:pPr>
-            <a:r>
-              <a:rPr sz="1200" b="0" i="0">
-                <a:solidFill>
-                  <a:srgbClr val="333333"/>
-                </a:solidFill>
-                <a:latin typeface="Calibri"/>
-              </a:rPr>
-              <a:t>–   ('A) Es más bonito', 1)</a:t>
-            </a:r>
-          </a:p>
-          <a:p>
-            <a:pPr>
-              <a:spcAft>
-                <a:spcPts val="800"/>
-              </a:spcAft>
-            </a:pPr>
-            <a:r>
-              <a:rPr sz="1200" b="0" i="0">
-                <a:solidFill>
-                  <a:srgbClr val="333333"/>
-                </a:solidFill>
-                <a:latin typeface="Calibri"/>
-              </a:rPr>
-              <a:t>–   ('B) Duplica reglas y rompe auditoría/seguridad del PI', 1)</a:t>
-            </a:r>
-          </a:p>
-          <a:p>
-            <a:pPr>
-              <a:spcAft>
-                <a:spcPts val="800"/>
-              </a:spcAft>
-            </a:pPr>
-            <a:r>
-              <a:rPr sz="1200" b="0" i="0">
-                <a:solidFill>
-                  <a:srgbClr val="333333"/>
-                </a:solidFill>
-                <a:latin typeface="Calibri"/>
-              </a:rPr>
-              <a:t>–   ('C) Acelera siempre', 1)</a:t>
-            </a:r>
-          </a:p>
-          <a:p>
-            <a:pPr>
-              <a:spcAft>
-                <a:spcPts val="800"/>
-              </a:spcAft>
-            </a:pPr>
-            <a:r>
-              <a:rPr sz="1200" b="0" i="0">
-                <a:solidFill>
-                  <a:srgbClr val="333333"/>
-                </a:solidFill>
-                <a:latin typeface="Calibri"/>
-              </a:rPr>
-              <a:t>–   ('D) Obliga a DROP', 1)</a:t>
-            </a:r>
-          </a:p>
-          <a:p>
-            <a:pPr>
-              <a:spcAft>
-                <a:spcPts val="800"/>
-              </a:spcAft>
-            </a:pPr>
-            <a:r>
-              <a:rPr sz="1200" b="0" i="0">
-                <a:solidFill>
-                  <a:srgbClr val="333333"/>
-                </a:solidFill>
-                <a:latin typeface="Calibri"/>
-              </a:rPr>
-              <a:t>–   </a:t>
-            </a:r>
-            <a:r>
-              <a:rPr sz="1200" b="1" i="0">
-                <a:solidFill>
-                  <a:srgbClr val="333333"/>
-                </a:solidFill>
-                <a:latin typeface="Calibri"/>
-              </a:rPr>
-              <a:t>3.</a:t>
-            </a:r>
-            <a:r>
-              <a:rPr sz="1200" b="0" i="0">
-                <a:solidFill>
-                  <a:srgbClr val="333333"/>
-                </a:solidFill>
-                <a:latin typeface="Calibri"/>
-              </a:rPr>
-              <a:t> La sustentación del PI dura típicamente 5 a 8 minutos.</a:t>
-            </a:r>
-          </a:p>
-          <a:p>
-            <a:pPr>
-              <a:spcAft>
-                <a:spcPts val="800"/>
-              </a:spcAft>
-            </a:pPr>
-            <a:r>
-              <a:rPr sz="1200" b="0" i="0">
-                <a:solidFill>
-                  <a:srgbClr val="333333"/>
-                </a:solidFill>
-                <a:latin typeface="Calibri"/>
-              </a:rPr>
-              <a:t>–   ('( ) Verdadero    ( ) Falso', 1)</a:t>
-            </a:r>
-          </a:p>
-          <a:p>
-            <a:pPr>
-              <a:spcAft>
-                <a:spcPts val="800"/>
-              </a:spcAft>
-            </a:pPr>
-            <a:r>
-              <a:rPr sz="1200" b="0" i="0">
-                <a:solidFill>
-                  <a:srgbClr val="333333"/>
-                </a:solidFill>
-                <a:latin typeface="Calibri"/>
-              </a:rPr>
-              <a:t>–   </a:t>
-            </a:r>
-            <a:r>
-              <a:rPr sz="1200" b="1" i="0">
-                <a:solidFill>
-                  <a:srgbClr val="333333"/>
-                </a:solidFill>
-                <a:latin typeface="Calibri"/>
-              </a:rPr>
-              <a:t>4.</a:t>
-            </a:r>
-            <a:r>
-              <a:rPr sz="1200" b="0" i="0">
-                <a:solidFill>
-                  <a:srgbClr val="333333"/>
-                </a:solidFill>
-                <a:latin typeface="Calibri"/>
-              </a:rPr>
-              <a:t> El ensayo de pitch de hoy sustituye el Parcial 3.</a:t>
-            </a:r>
-          </a:p>
-          <a:p>
-            <a:pPr>
-              <a:spcAft>
-                <a:spcPts val="800"/>
-              </a:spcAft>
-            </a:pPr>
-            <a:r>
-              <a:rPr sz="1200" b="0" i="0">
-                <a:solidFill>
-                  <a:srgbClr val="333333"/>
-                </a:solidFill>
-                <a:latin typeface="Calibri"/>
-              </a:rPr>
-              <a:t>–   ('( ) Verdadero    ( ) Falso', 1)</a:t>
-            </a:r>
-          </a:p>
-        </p:txBody>
-      </p:sp>
-      <p:sp>
-        <p:nvSpPr>
-          <p:cNvPr id="7" name="TextBox 6"/>
-          <p:cNvSpPr txBox="1"/>
-          <p:nvPr/>
-        </p:nvSpPr>
-        <p:spPr>
-          <a:xfrm>
-            <a:off x="11185855" y="6473952"/>
-            <a:ext cx="640080" cy="274320"/>
-          </a:xfrm>
-          <a:prstGeom prst="rect">
-            <a:avLst/>
-          </a:prstGeom>
-          <a:noFill/>
-        </p:spPr>
-        <p:txBody>
-          <a:bodyPr wrap="square">
-            <a:spAutoFit/>
-          </a:bodyPr>
-          <a:lstStyle/>
-          <a:p>
-            <a:pPr algn="r"/>
-            <a:r>
-              <a:rPr sz="1100" b="0" i="0">
-                <a:solidFill>
-                  <a:srgbClr val="666666"/>
-                </a:solidFill>
-                <a:latin typeface="Calibri"/>
-              </a:rPr>
-              <a:t>15</a:t>
-            </a:r>
-          </a:p>
-        </p:txBody>
-      </p:sp>
-    </p:spTree>
-  </p:cSld>
-  <p:clrMapOvr>
-    <a:masterClrMapping/>
-  </p:clrMapOvr>
-</p:sld>
-</file>
-
-<file path=ppt/slides/slide16.xml><?xml version="1.0" encoding="utf-8"?>
-<p:sld xmlns:a="http://schemas.openxmlformats.org/drawingml/2006/main" xmlns:p="http://schemas.openxmlformats.org/presentationml/2006/main" xmlns:r="http://schemas.openxmlformats.org/officeDocument/2006/relationships">
-  <p:cSld>
-    <p:bg>
-      <p:bgPr>
-        <a:solidFill>
-          <a:srgbClr val="FFFFFF"/>
-        </a:solidFill>
-        <a:effectLst/>
-      </p:bgPr>
-    </p:bg>
-    <p:spTree>
-      <p:nvGrpSpPr>
-        <p:cNvPr id="1" name=""/>
-        <p:cNvGrpSpPr/>
-        <p:nvPr/>
-      </p:nvGrpSpPr>
-      <p:grpSpPr/>
-      <p:sp>
-        <p:nvSpPr>
-          <p:cNvPr id="2" name="Rectangle 1"/>
-          <p:cNvSpPr/>
-          <p:nvPr/>
-        </p:nvSpPr>
-        <p:spPr>
-          <a:xfrm>
-            <a:off x="0" y="0"/>
-            <a:ext cx="12191695" cy="1170432"/>
-          </a:xfrm>
-          <a:prstGeom prst="rect">
-            <a:avLst/>
-          </a:prstGeom>
-          <a:solidFill>
-            <a:srgbClr val="095292"/>
-          </a:solidFill>
-          <a:ln>
-            <a:noFill/>
-          </a:ln>
-        </p:spPr>
-        <p:style>
-          <a:lnRef idx="1">
-            <a:schemeClr val="accent1"/>
-          </a:lnRef>
-          <a:fillRef idx="3">
-            <a:schemeClr val="accent1"/>
-          </a:fillRef>
-          <a:effectRef idx="2">
-            <a:schemeClr val="accent1"/>
-          </a:effectRef>
-          <a:fontRef idx="minor">
-            <a:schemeClr val="lt1"/>
-          </a:fontRef>
-        </p:style>
-        <p:txBody>
-          <a:bodyPr rtlCol="0" anchor="ctr"/>
-          <a:lstStyle/>
-          <a:p>
-            <a:pPr algn="ctr"/>
-          </a:p>
-        </p:txBody>
-      </p:sp>
-      <p:sp>
-        <p:nvSpPr>
-          <p:cNvPr id="3" name="Rectangle 2"/>
-          <p:cNvSpPr/>
-          <p:nvPr/>
-        </p:nvSpPr>
-        <p:spPr>
-          <a:xfrm>
-            <a:off x="0" y="1170432"/>
-            <a:ext cx="12191695" cy="41148"/>
-          </a:xfrm>
-          <a:prstGeom prst="rect">
-            <a:avLst/>
-          </a:prstGeom>
-          <a:solidFill>
-            <a:srgbClr val="FFD000"/>
-          </a:solidFill>
-          <a:ln>
-            <a:noFill/>
-          </a:ln>
-        </p:spPr>
-        <p:style>
-          <a:lnRef idx="1">
-            <a:schemeClr val="accent1"/>
-          </a:lnRef>
-          <a:fillRef idx="3">
-            <a:schemeClr val="accent1"/>
-          </a:fillRef>
-          <a:effectRef idx="2">
-            <a:schemeClr val="accent1"/>
-          </a:effectRef>
-          <a:fontRef idx="minor">
-            <a:schemeClr val="lt1"/>
-          </a:fontRef>
-        </p:style>
-        <p:txBody>
-          <a:bodyPr rtlCol="0" anchor="ctr"/>
-          <a:lstStyle/>
-          <a:p>
-            <a:pPr algn="ctr"/>
-          </a:p>
-        </p:txBody>
-      </p:sp>
-      <p:sp>
-        <p:nvSpPr>
-          <p:cNvPr id="4" name="TextBox 3"/>
-          <p:cNvSpPr txBox="1"/>
-          <p:nvPr/>
-        </p:nvSpPr>
-        <p:spPr>
-          <a:xfrm>
-            <a:off x="457200" y="164592"/>
-            <a:ext cx="11277295" cy="384048"/>
-          </a:xfrm>
-          <a:prstGeom prst="rect">
-            <a:avLst/>
-          </a:prstGeom>
-          <a:noFill/>
-        </p:spPr>
-        <p:txBody>
-          <a:bodyPr wrap="square">
-            <a:spAutoFit/>
-          </a:bodyPr>
-          <a:lstStyle/>
-          <a:p>
-            <a:r>
-              <a:rPr sz="2600" b="1" i="0">
-                <a:solidFill>
-                  <a:srgbClr val="FFFFFF"/>
-                </a:solidFill>
-                <a:latin typeface="Calibri"/>
-              </a:rPr>
-              <a:t>Quiz rapido (cierre) · cont. 2</a:t>
-            </a:r>
-          </a:p>
-        </p:txBody>
-      </p:sp>
-      <p:sp>
-        <p:nvSpPr>
-          <p:cNvPr id="5" name="TextBox 4"/>
-          <p:cNvSpPr txBox="1"/>
-          <p:nvPr/>
-        </p:nvSpPr>
-        <p:spPr>
-          <a:xfrm>
-            <a:off x="457200" y="566928"/>
-            <a:ext cx="11277295" cy="411480"/>
-          </a:xfrm>
-          <a:prstGeom prst="rect">
-            <a:avLst/>
-          </a:prstGeom>
-          <a:noFill/>
-        </p:spPr>
-        <p:txBody>
-          <a:bodyPr wrap="square">
-            <a:spAutoFit/>
-          </a:bodyPr>
-          <a:lstStyle/>
-          <a:p>
-            <a:r>
-              <a:rPr sz="1400" b="0" i="0">
-                <a:solidFill>
-                  <a:srgbClr val="B8D8EE"/>
-                </a:solidFill>
-                <a:latin typeface="Calibri"/>
-              </a:rPr>
-              <a:t>Individual · 8–10 min</a:t>
-            </a:r>
-          </a:p>
-        </p:txBody>
-      </p:sp>
-      <p:sp>
-        <p:nvSpPr>
-          <p:cNvPr id="6" name="TextBox 5"/>
-          <p:cNvSpPr txBox="1"/>
-          <p:nvPr/>
-        </p:nvSpPr>
-        <p:spPr>
-          <a:xfrm>
-            <a:off x="457200" y="1380744"/>
-            <a:ext cx="11277295" cy="5020056"/>
-          </a:xfrm>
-          <a:prstGeom prst="rect">
-            <a:avLst/>
-          </a:prstGeom>
-          <a:noFill/>
-        </p:spPr>
-        <p:txBody>
-          <a:bodyPr wrap="square">
-            <a:spAutoFit/>
-          </a:bodyPr>
-          <a:lstStyle/>
-          <a:p>
-            <a:pPr>
-              <a:spcAft>
-                <a:spcPts val="800"/>
-              </a:spcAft>
-            </a:pPr>
-            <a:r>
-              <a:rPr sz="1200" b="0" i="0">
-                <a:solidFill>
-                  <a:srgbClr val="333333"/>
-                </a:solidFill>
-                <a:latin typeface="Calibri"/>
-              </a:rPr>
-              <a:t>–   </a:t>
-            </a:r>
-            <a:r>
-              <a:rPr sz="1200" b="1" i="0">
-                <a:solidFill>
-                  <a:srgbClr val="333333"/>
-                </a:solidFill>
-                <a:latin typeface="Calibri"/>
-              </a:rPr>
-              <a:t>5.</a:t>
-            </a:r>
-            <a:r>
-              <a:rPr sz="1200" b="0" i="0">
-                <a:solidFill>
-                  <a:srgbClr val="333333"/>
-                </a:solidFill>
-                <a:latin typeface="Calibri"/>
-              </a:rPr>
-              <a:t> Entrada típica del contrato para agendar:</a:t>
-            </a:r>
-          </a:p>
-          <a:p>
-            <a:pPr>
-              <a:spcAft>
-                <a:spcPts val="800"/>
-              </a:spcAft>
-            </a:pPr>
-            <a:r>
-              <a:rPr sz="1200" b="0" i="0">
-                <a:solidFill>
-                  <a:srgbClr val="333333"/>
-                </a:solidFill>
-                <a:latin typeface="Calibri"/>
-              </a:rPr>
-              <a:t>–   ('A) sp_agendar_cita(params) + errores + ejemplo CALL', 1)</a:t>
-            </a:r>
-          </a:p>
-          <a:p>
-            <a:pPr>
-              <a:spcAft>
-                <a:spcPts val="800"/>
-              </a:spcAft>
-            </a:pPr>
-            <a:r>
-              <a:rPr sz="1200" b="0" i="0">
-                <a:solidFill>
-                  <a:srgbClr val="333333"/>
-                </a:solidFill>
-                <a:latin typeface="Calibri"/>
-              </a:rPr>
-              <a:t>–   ('B) Solo «usar la BD»', 1)</a:t>
-            </a:r>
-          </a:p>
-          <a:p>
-            <a:pPr>
-              <a:spcAft>
-                <a:spcPts val="800"/>
-              </a:spcAft>
-            </a:pPr>
-            <a:r>
-              <a:rPr sz="1200" b="0" i="0">
-                <a:solidFill>
-                  <a:srgbClr val="333333"/>
-                </a:solidFill>
-                <a:latin typeface="Calibri"/>
-              </a:rPr>
-              <a:t>–   ('C) SELECT * sin firma', 1)</a:t>
-            </a:r>
-          </a:p>
-          <a:p>
-            <a:pPr>
-              <a:spcAft>
-                <a:spcPts val="800"/>
-              </a:spcAft>
-            </a:pPr>
-            <a:r>
-              <a:rPr sz="1200" b="0" i="0">
-                <a:solidFill>
-                  <a:srgbClr val="333333"/>
-                </a:solidFill>
-                <a:latin typeface="Calibri"/>
-              </a:rPr>
-              <a:t>–   ('D) Token de AWS', 1)</a:t>
-            </a:r>
-          </a:p>
-          <a:p>
-            <a:pPr>
-              <a:spcAft>
-                <a:spcPts val="800"/>
-              </a:spcAft>
-            </a:pPr>
-            <a:r>
-              <a:rPr sz="1200" b="0" i="0">
-                <a:solidFill>
-                  <a:srgbClr val="333333"/>
-                </a:solidFill>
-                <a:latin typeface="Calibri"/>
-              </a:rPr>
-              <a:t>–   </a:t>
-            </a:r>
-            <a:r>
-              <a:rPr sz="1200" b="1" i="0">
-                <a:solidFill>
-                  <a:srgbClr val="333333"/>
-                </a:solidFill>
-                <a:latin typeface="Calibri"/>
-              </a:rPr>
-              <a:t>6.</a:t>
-            </a:r>
-            <a:r>
-              <a:rPr sz="1200" b="0" i="0">
-                <a:solidFill>
-                  <a:srgbClr val="333333"/>
-                </a:solidFill>
-                <a:latin typeface="Calibri"/>
-              </a:rPr>
-              <a:t> El contrato debe alinearse con los procedimientos ya implementados en el PI.</a:t>
-            </a:r>
-          </a:p>
-          <a:p>
-            <a:pPr>
-              <a:spcAft>
-                <a:spcPts val="800"/>
-              </a:spcAft>
-            </a:pPr>
-            <a:r>
-              <a:rPr sz="1200" b="0" i="0">
-                <a:solidFill>
-                  <a:srgbClr val="333333"/>
-                </a:solidFill>
-                <a:latin typeface="Calibri"/>
-              </a:rPr>
-              <a:t>–   ('( ) Verdadero    ( ) Falso', 1)</a:t>
-            </a:r>
-          </a:p>
-          <a:p>
-            <a:pPr>
-              <a:spcAft>
-                <a:spcPts val="800"/>
-              </a:spcAft>
-            </a:pPr>
-            <a:r>
-              <a:rPr sz="1200" b="0" i="0">
-                <a:solidFill>
-                  <a:srgbClr val="333333"/>
-                </a:solidFill>
-                <a:latin typeface="Calibri"/>
-              </a:rPr>
-              <a:t>–   </a:t>
-            </a:r>
-            <a:r>
-              <a:rPr sz="1200" b="1" i="0">
-                <a:solidFill>
-                  <a:srgbClr val="333333"/>
-                </a:solidFill>
-                <a:latin typeface="Calibri"/>
-              </a:rPr>
-              <a:t>7.</a:t>
-            </a:r>
-            <a:r>
-              <a:rPr sz="1200" b="0" i="0">
-                <a:solidFill>
-                  <a:srgbClr val="333333"/>
-                </a:solidFill>
-                <a:latin typeface="Calibri"/>
-              </a:rPr>
-              <a:t> Escriba 2 operaciones de su contrato (nombre + 1 parámetro clave cada una).</a:t>
-            </a:r>
-          </a:p>
-          <a:p>
-            <a:pPr>
-              <a:spcAft>
-                <a:spcPts val="800"/>
-              </a:spcAft>
-            </a:pPr>
-            <a:r>
-              <a:rPr sz="1200" b="0" i="0">
-                <a:solidFill>
-                  <a:srgbClr val="333333"/>
-                </a:solidFill>
-                <a:latin typeface="Calibri"/>
-              </a:rPr>
-              <a:t>–   ('Respuesta corta: ____________________________', 1)</a:t>
-            </a:r>
-          </a:p>
-          <a:p>
-            <a:pPr>
-              <a:spcAft>
-                <a:spcPts val="800"/>
-              </a:spcAft>
-            </a:pPr>
-            <a:r>
-              <a:rPr sz="1200" b="0" i="0">
-                <a:solidFill>
-                  <a:srgbClr val="333333"/>
-                </a:solidFill>
-                <a:latin typeface="Calibri"/>
-              </a:rPr>
-              <a:t>–   </a:t>
-            </a:r>
-            <a:r>
-              <a:rPr sz="1200" b="1" i="0">
-                <a:solidFill>
-                  <a:srgbClr val="333333"/>
-                </a:solidFill>
-                <a:latin typeface="Calibri"/>
-              </a:rPr>
-              <a:t>8.</a:t>
-            </a:r>
-            <a:r>
-              <a:rPr sz="1200" b="0" i="0">
-                <a:solidFill>
-                  <a:srgbClr val="333333"/>
-                </a:solidFill>
-                <a:latin typeface="Calibri"/>
-              </a:rPr>
-              <a:t> Indique un error de negocio que la app debe manejar (código/mensaje).</a:t>
-            </a:r>
-          </a:p>
-          <a:p>
-            <a:pPr>
-              <a:spcAft>
-                <a:spcPts val="800"/>
-              </a:spcAft>
-            </a:pPr>
-            <a:r>
-              <a:rPr sz="1200" b="0" i="0">
-                <a:solidFill>
-                  <a:srgbClr val="333333"/>
-                </a:solidFill>
-                <a:latin typeface="Calibri"/>
-              </a:rPr>
-              <a:t>–   ('Respuesta corta: ____________________________', 1)</a:t>
-            </a:r>
-          </a:p>
-        </p:txBody>
-      </p:sp>
-      <p:sp>
-        <p:nvSpPr>
-          <p:cNvPr id="7" name="TextBox 6"/>
-          <p:cNvSpPr txBox="1"/>
-          <p:nvPr/>
-        </p:nvSpPr>
-        <p:spPr>
-          <a:xfrm>
-            <a:off x="11185855" y="6473952"/>
-            <a:ext cx="640080" cy="274320"/>
-          </a:xfrm>
-          <a:prstGeom prst="rect">
-            <a:avLst/>
-          </a:prstGeom>
-          <a:noFill/>
-        </p:spPr>
-        <p:txBody>
-          <a:bodyPr wrap="square">
-            <a:spAutoFit/>
-          </a:bodyPr>
-          <a:lstStyle/>
-          <a:p>
-            <a:pPr algn="r"/>
-            <a:r>
-              <a:rPr sz="1100" b="0" i="0">
-                <a:solidFill>
-                  <a:srgbClr val="666666"/>
-                </a:solidFill>
-                <a:latin typeface="Calibri"/>
-              </a:rPr>
-              <a:t>16</a:t>
-            </a:r>
-          </a:p>
-        </p:txBody>
-      </p:sp>
-    </p:spTree>
-  </p:cSld>
-  <p:clrMapOvr>
-    <a:masterClrMapping/>
-  </p:clrMapOvr>
-</p:sld>
-</file>
-
-<file path=ppt/slides/slide17.xml><?xml version="1.0" encoding="utf-8"?>
-<p:sld xmlns:a="http://schemas.openxmlformats.org/drawingml/2006/main" xmlns:p="http://schemas.openxmlformats.org/presentationml/2006/main" xmlns:r="http://schemas.openxmlformats.org/officeDocument/2006/relationships">
-  <p:cSld>
-    <p:bg>
-      <p:bgPr>
-        <a:solidFill>
-          <a:srgbClr val="FFFFFF"/>
-        </a:solidFill>
-        <a:effectLst/>
-      </p:bgPr>
-    </p:bg>
-    <p:spTree>
-      <p:nvGrpSpPr>
-        <p:cNvPr id="1" name=""/>
-        <p:cNvGrpSpPr/>
-        <p:nvPr/>
-      </p:nvGrpSpPr>
-      <p:grpSpPr/>
-      <p:sp>
-        <p:nvSpPr>
-          <p:cNvPr id="2" name="Rectangle 1"/>
-          <p:cNvSpPr/>
-          <p:nvPr/>
-        </p:nvSpPr>
-        <p:spPr>
-          <a:xfrm>
-            <a:off x="0" y="0"/>
             <a:ext cx="12191695" cy="164592"/>
           </a:xfrm>
           <a:prstGeom prst="rect">
@@ -8451,7 +7438,7 @@
                 </a:solidFill>
                 <a:latin typeface="Calibri"/>
               </a:rPr>
-              <a:t>Criterios · quiz/cierre · duda PI</a:t>
+              <a:t>Criterios de exito · cierre · dudas del PI</a:t>
             </a:r>
           </a:p>
         </p:txBody>

--- a/Bases de Datos II/Clases/Clase 12 - Integracion y preparacion final/Presentacion.pptx
+++ b/Bases de Datos II/Clases/Clase 12 - Integracion y preparacion final/Presentacion.pptx
@@ -5440,7 +5440,7 @@
                 </a:solidFill>
                 <a:latin typeface="Calibri"/>
               </a:rPr>
-              <a:t> (Talleres) — domingo 23:59 cuando aplique taller.</a:t>
+              <a:t> (https://examlab.lovable.app/) — domingo 23:59 cuando aplique taller.</a:t>
             </a:r>
           </a:p>
         </p:txBody>
@@ -6035,7 +6035,7 @@
                 </a:solidFill>
                 <a:latin typeface="Calibri"/>
               </a:rPr>
-              <a:t>Taller de la semana en ExamLab: domingo 23:59 (regla del Acuerdo) cuando aplique.</a:t>
+              <a:t>Taller de la semana en ExamLab (https://examlab.lovable.app/): domingo 23:59 (regla del Acuerdo) cuando aplique.</a:t>
             </a:r>
           </a:p>
         </p:txBody>

--- a/Bases de Datos II/Clases/Clase 12 - Integracion y preparacion final/Presentacion.pptx
+++ b/Bases de Datos II/Clases/Clase 12 - Integracion y preparacion final/Presentacion.pptx
@@ -7776,22 +7776,6 @@
                 <a:latin typeface="Calibri"/>
               </a:rPr>
               <a:t>–   Preparar la sustentacion no es 'hacer diapositivas bonitas': es organizar la evidencia tecnica en una…</a:t>
-            </a:r>
-          </a:p>
-          <a:p>
-            <a:pPr>
-              <a:spcAft>
-                <a:spcPts val="800"/>
-              </a:spcAft>
-            </a:pPr>
-            <a:r>
-              <a:rPr sz="1500" b="0" i="0">
-                <a:solidFill>
-                  <a:srgbClr val="333333"/>
-                </a:solidFill>
-                <a:latin typeface="Calibri"/>
-              </a:rPr>
-              <a:t>–   Error de docente que no domina el tema: dejar que la 'integracion' quede como una idea abstracta sin contrato…</a:t>
             </a:r>
           </a:p>
         </p:txBody>

--- a/Bases de Datos II/Clases/Clase 12 - Integracion y preparacion final/Presentacion.pptx
+++ b/Bases de Datos II/Clases/Clase 12 - Integracion y preparacion final/Presentacion.pptx
@@ -5390,7 +5390,7 @@
                 </a:solidFill>
                 <a:latin typeface="Calibri"/>
               </a:rPr>
-              <a:t>–   Evidencia en playground (enlace) o archivo SQL/PNG del equipo.</a:t>
+              <a:t>–   Evidencia en playground (enlace) o archivo SQL/PNG propio.</a:t>
             </a:r>
           </a:p>
           <a:p>
@@ -6639,7 +6639,7 @@
                 </a:solidFill>
                 <a:latin typeface="Calibri"/>
               </a:rPr>
-              <a:t>–   Al salir: avance concreto en el paquete VetCare del equipo.</a:t>
+              <a:t>–   Al salir: avance concreto en su paquete VetCare.</a:t>
             </a:r>
           </a:p>
         </p:txBody>
@@ -8534,7 +8534,7 @@
                 </a:solidFill>
                 <a:latin typeface="Calibri"/>
               </a:rPr>
-              <a:t>–   Al final de la demo: dejar enlace/script compartible al equipo.</a:t>
+              <a:t>–   Al final de la demo: dejar enlace/script compartible al grupo.</a:t>
             </a:r>
           </a:p>
         </p:txBody>

--- a/Bases de Datos II/Clases/Clase 12 - Integracion y preparacion final/Presentacion.pptx
+++ b/Bases de Datos II/Clases/Clase 12 - Integracion y preparacion final/Presentacion.pptx
@@ -5440,7 +5440,7 @@
                 </a:solidFill>
                 <a:latin typeface="Calibri"/>
               </a:rPr>
-              <a:t> (https://examlab.lovable.app/) — domingo 23:59 cuando aplique taller.</a:t>
+              <a:t> (https://uniaj.examlab.workers.dev/) — domingo 23:59 cuando aplique taller.</a:t>
             </a:r>
           </a:p>
         </p:txBody>
@@ -6035,7 +6035,7 @@
                 </a:solidFill>
                 <a:latin typeface="Calibri"/>
               </a:rPr>
-              <a:t>Taller de la semana en ExamLab (https://examlab.lovable.app/): domingo 23:59 (regla del Acuerdo) cuando aplique.</a:t>
+              <a:t>Taller de la semana en ExamLab (https://uniaj.examlab.workers.dev/): domingo 23:59 (regla del Acuerdo) cuando aplique.</a:t>
             </a:r>
           </a:p>
         </p:txBody>

--- a/Bases de Datos II/Clases/Clase 12 - Integracion y preparacion final/Presentacion.pptx
+++ b/Bases de Datos II/Clases/Clase 12 - Integracion y preparacion final/Presentacion.pptx
@@ -20,6 +20,7 @@
     <p:sldId id="268" r:id="rId19"/>
     <p:sldId id="269" r:id="rId20"/>
     <p:sldId id="270" r:id="rId21"/>
+    <p:sldId id="271" r:id="rId22"/>
   </p:sldIdLst>
   <p:sldSz cx="12191695" cy="6858000" type="screen4x3"/>
   <p:notesSz cx="6858000" cy="9144000"/>
@@ -3620,7 +3621,7 @@
                 </a:solidFill>
                 <a:latin typeface="Calibri"/>
               </a:rPr>
-              <a:t>Taller PI VetCare — escenario / datos de partida</a:t>
+              <a:t>Taller PI VetCare — objetivo y criterios</a:t>
             </a:r>
           </a:p>
         </p:txBody>
@@ -3653,13 +3654,167 @@
               </a:spcAft>
             </a:pPr>
             <a:r>
-              <a:rPr sz="1600" b="0" i="0">
+              <a:rPr sz="1500" b="0" i="0">
                 <a:solidFill>
                   <a:srgbClr val="333333"/>
                 </a:solidFill>
                 <a:latin typeface="Calibri"/>
               </a:rPr>
-              <a:t>–   Plantilla sp_agendar_cita / consulta / facturar.</a:t>
+              <a:t>–   </a:t>
+            </a:r>
+            <a:r>
+              <a:rPr sz="1500" b="1" i="0">
+                <a:solidFill>
+                  <a:srgbClr val="333333"/>
+                </a:solidFill>
+                <a:latin typeface="Calibri"/>
+              </a:rPr>
+              <a:t>Objetivo:</a:t>
+            </a:r>
+            <a:r>
+              <a:rPr sz="1500" b="0" i="0">
+                <a:solidFill>
+                  <a:srgbClr val="333333"/>
+                </a:solidFill>
+                <a:latin typeface="Calibri"/>
+              </a:rPr>
+              <a:t> Contrato &gt;=3 ops + outline pitch 5-8 min.</a:t>
+            </a:r>
+          </a:p>
+          <a:p>
+            <a:pPr>
+              <a:spcAft>
+                <a:spcPts val="800"/>
+              </a:spcAft>
+            </a:pPr>
+            <a:r>
+              <a:rPr sz="1500" b="0" i="0">
+                <a:solidFill>
+                  <a:srgbClr val="333333"/>
+                </a:solidFill>
+                <a:latin typeface="Calibri"/>
+              </a:rPr>
+              <a:t>–   </a:t>
+            </a:r>
+            <a:r>
+              <a:rPr sz="1500" b="1" i="0">
+                <a:solidFill>
+                  <a:srgbClr val="333333"/>
+                </a:solidFill>
+                <a:latin typeface="Calibri"/>
+              </a:rPr>
+              <a:t>Exito:</a:t>
+            </a:r>
+            <a:r>
+              <a:rPr sz="1500" b="0" i="0">
+                <a:solidFill>
+                  <a:srgbClr val="333333"/>
+                </a:solidFill>
+                <a:latin typeface="Calibri"/>
+              </a:rPr>
+              <a:t> Contrato 3 ops.</a:t>
+            </a:r>
+          </a:p>
+          <a:p>
+            <a:pPr>
+              <a:spcAft>
+                <a:spcPts val="800"/>
+              </a:spcAft>
+            </a:pPr>
+            <a:r>
+              <a:rPr sz="1500" b="0" i="0">
+                <a:solidFill>
+                  <a:srgbClr val="333333"/>
+                </a:solidFill>
+                <a:latin typeface="Calibri"/>
+              </a:rPr>
+              <a:t>–   </a:t>
+            </a:r>
+            <a:r>
+              <a:rPr sz="1500" b="1" i="0">
+                <a:solidFill>
+                  <a:srgbClr val="333333"/>
+                </a:solidFill>
+                <a:latin typeface="Calibri"/>
+              </a:rPr>
+              <a:t>Exito:</a:t>
+            </a:r>
+            <a:r>
+              <a:rPr sz="1500" b="0" i="0">
+                <a:solidFill>
+                  <a:srgbClr val="333333"/>
+                </a:solidFill>
+                <a:latin typeface="Calibri"/>
+              </a:rPr>
+              <a:t> Parametros/errores/ejemplo.</a:t>
+            </a:r>
+          </a:p>
+          <a:p>
+            <a:pPr>
+              <a:spcAft>
+                <a:spcPts val="800"/>
+              </a:spcAft>
+            </a:pPr>
+            <a:r>
+              <a:rPr sz="1500" b="0" i="0">
+                <a:solidFill>
+                  <a:srgbClr val="333333"/>
+                </a:solidFill>
+                <a:latin typeface="Calibri"/>
+              </a:rPr>
+              <a:t>–   </a:t>
+            </a:r>
+            <a:r>
+              <a:rPr sz="1500" b="1" i="0">
+                <a:solidFill>
+                  <a:srgbClr val="333333"/>
+                </a:solidFill>
+                <a:latin typeface="Calibri"/>
+              </a:rPr>
+              <a:t>Exito:</a:t>
+            </a:r>
+            <a:r>
+              <a:rPr sz="1500" b="0" i="0">
+                <a:solidFill>
+                  <a:srgbClr val="333333"/>
+                </a:solidFill>
+                <a:latin typeface="Calibri"/>
+              </a:rPr>
+              <a:t> Outline pitch.</a:t>
+            </a:r>
+          </a:p>
+          <a:p>
+            <a:pPr>
+              <a:spcAft>
+                <a:spcPts val="800"/>
+              </a:spcAft>
+            </a:pPr>
+            <a:r>
+              <a:rPr sz="1500" b="0" i="0">
+                <a:solidFill>
+                  <a:srgbClr val="333333"/>
+                </a:solidFill>
+                <a:latin typeface="Calibri"/>
+              </a:rPr>
+              <a:t>–   </a:t>
+            </a:r>
+            <a:r>
+              <a:rPr sz="1500" b="1" i="0">
+                <a:solidFill>
+                  <a:srgbClr val="333333"/>
+                </a:solidFill>
+                <a:latin typeface="Calibri"/>
+              </a:rPr>
+              <a:t>Exito:</a:t>
+            </a:r>
+            <a:r>
+              <a:rPr sz="1500" b="0" i="0">
+                <a:solidFill>
+                  <a:srgbClr val="333333"/>
+                </a:solidFill>
+                <a:latin typeface="Calibri"/>
+              </a:rPr>
+              <a:t> Borrador final.</a:t>
             </a:r>
           </a:p>
         </p:txBody>
@@ -3840,111 +3995,21 @@
                 </a:solidFill>
                 <a:latin typeface="Calibri"/>
               </a:rPr>
-              <a:t>Taller PI VetCare — pasos guiados</a:t>
-            </a:r>
-          </a:p>
-        </p:txBody>
-      </p:sp>
-      <p:sp>
-        <p:nvSpPr>
-          <p:cNvPr id="5" name="Rounded Rectangle 4"/>
-          <p:cNvSpPr/>
-          <p:nvPr/>
-        </p:nvSpPr>
-        <p:spPr>
-          <a:xfrm>
-            <a:off x="457200" y="1234440"/>
-            <a:ext cx="11277295" cy="777240"/>
-          </a:xfrm>
-          <a:prstGeom prst="roundRect">
-            <a:avLst>
-              <a:gd name="adj" fmla="val 12000"/>
-            </a:avLst>
-          </a:prstGeom>
-          <a:solidFill>
-            <a:srgbClr val="F2F2F2"/>
-          </a:solidFill>
-          <a:ln>
-            <a:noFill/>
-          </a:ln>
-        </p:spPr>
-        <p:style>
-          <a:lnRef idx="1">
-            <a:schemeClr val="accent1"/>
-          </a:lnRef>
-          <a:fillRef idx="3">
-            <a:schemeClr val="accent1"/>
-          </a:fillRef>
-          <a:effectRef idx="2">
-            <a:schemeClr val="accent1"/>
-          </a:effectRef>
-          <a:fontRef idx="minor">
-            <a:schemeClr val="lt1"/>
-          </a:fontRef>
-        </p:style>
-        <p:txBody>
-          <a:bodyPr rtlCol="0" anchor="ctr"/>
-          <a:lstStyle/>
-          <a:p>
-            <a:pPr algn="ctr"/>
-          </a:p>
-        </p:txBody>
-      </p:sp>
-      <p:sp>
-        <p:nvSpPr>
-          <p:cNvPr id="6" name="Rounded Rectangle 5"/>
-          <p:cNvSpPr/>
-          <p:nvPr/>
-        </p:nvSpPr>
-        <p:spPr>
-          <a:xfrm>
-            <a:off x="594360" y="1403604"/>
-            <a:ext cx="438912" cy="438912"/>
-          </a:xfrm>
-          <a:prstGeom prst="roundRect">
-            <a:avLst>
-              <a:gd name="adj" fmla="val 12000"/>
-            </a:avLst>
-          </a:prstGeom>
-          <a:solidFill>
-            <a:srgbClr val="095292"/>
-          </a:solidFill>
-          <a:ln>
-            <a:noFill/>
-          </a:ln>
-        </p:spPr>
-        <p:style>
-          <a:lnRef idx="1">
-            <a:schemeClr val="accent1"/>
-          </a:lnRef>
-          <a:fillRef idx="3">
-            <a:schemeClr val="accent1"/>
-          </a:fillRef>
-          <a:effectRef idx="2">
-            <a:schemeClr val="accent1"/>
-          </a:effectRef>
-          <a:fontRef idx="minor">
-            <a:schemeClr val="lt1"/>
-          </a:fontRef>
-        </p:style>
-        <p:txBody>
-          <a:bodyPr rtlCol="0" anchor="ctr"/>
-          <a:lstStyle/>
-          <a:p>
-            <a:pPr algn="ctr"/>
-          </a:p>
-        </p:txBody>
-      </p:sp>
-      <p:sp>
-        <p:nvSpPr>
-          <p:cNvPr id="7" name="TextBox 6"/>
+              <a:t>Taller PI VetCare — escenario / datos de partida</a:t>
+            </a:r>
+          </a:p>
+        </p:txBody>
+      </p:sp>
+      <p:sp>
+        <p:nvSpPr>
+          <p:cNvPr id="5" name="TextBox 4"/>
           <p:cNvSpPr txBox="1"/>
           <p:nvPr/>
         </p:nvSpPr>
         <p:spPr>
           <a:xfrm>
-            <a:off x="594360" y="1403604"/>
-            <a:ext cx="438912" cy="438912"/>
+            <a:off x="457200" y="1170432"/>
+            <a:ext cx="11277295" cy="5230368"/>
           </a:xfrm>
           <a:prstGeom prst="rect">
             <a:avLst/>
@@ -3952,522 +4017,31 @@
           <a:noFill/>
         </p:spPr>
         <p:txBody>
-          <a:bodyPr wrap="square" anchor="ctr"/>
-          <a:lstStyle/>
-          <a:p>
-            <a:pPr algn="ctr"/>
-            <a:r>
-              <a:rPr sz="1600" b="1" i="0">
-                <a:solidFill>
-                  <a:srgbClr val="FFFFFF"/>
-                </a:solidFill>
-                <a:latin typeface="Calibri"/>
-              </a:rPr>
-              <a:t>1</a:t>
-            </a:r>
-          </a:p>
-        </p:txBody>
-      </p:sp>
-      <p:sp>
-        <p:nvSpPr>
-          <p:cNvPr id="8" name="TextBox 7"/>
-          <p:cNvSpPr txBox="1"/>
-          <p:nvPr/>
-        </p:nvSpPr>
-        <p:spPr>
-          <a:xfrm>
-            <a:off x="1188720" y="1325880"/>
-            <a:ext cx="10271455" cy="612647"/>
-          </a:xfrm>
-          <a:prstGeom prst="rect">
-            <a:avLst/>
-          </a:prstGeom>
-          <a:noFill/>
-        </p:spPr>
-        <p:txBody>
-          <a:bodyPr wrap="square" anchor="ctr"/>
-          <a:lstStyle/>
-          <a:p>
-            <a:r>
-              <a:rPr sz="1500" b="1" i="0">
-                <a:solidFill>
-                  <a:srgbClr val="095292"/>
-                </a:solidFill>
-                <a:latin typeface="Calibri"/>
-              </a:rPr>
-              <a:t>Redactar contrato de &gt;=3 operaciones.</a:t>
-            </a:r>
-          </a:p>
-        </p:txBody>
-      </p:sp>
-      <p:sp>
-        <p:nvSpPr>
-          <p:cNvPr id="9" name="Rounded Rectangle 8"/>
-          <p:cNvSpPr/>
-          <p:nvPr/>
-        </p:nvSpPr>
-        <p:spPr>
-          <a:xfrm>
-            <a:off x="457200" y="2103120"/>
-            <a:ext cx="11277295" cy="777240"/>
-          </a:xfrm>
-          <a:prstGeom prst="roundRect">
-            <a:avLst>
-              <a:gd name="adj" fmla="val 12000"/>
-            </a:avLst>
-          </a:prstGeom>
-          <a:solidFill>
-            <a:srgbClr val="E8F4FA"/>
-          </a:solidFill>
-          <a:ln>
-            <a:noFill/>
-          </a:ln>
-        </p:spPr>
-        <p:style>
-          <a:lnRef idx="1">
-            <a:schemeClr val="accent1"/>
-          </a:lnRef>
-          <a:fillRef idx="3">
-            <a:schemeClr val="accent1"/>
-          </a:fillRef>
-          <a:effectRef idx="2">
-            <a:schemeClr val="accent1"/>
-          </a:effectRef>
-          <a:fontRef idx="minor">
-            <a:schemeClr val="lt1"/>
-          </a:fontRef>
-        </p:style>
-        <p:txBody>
-          <a:bodyPr rtlCol="0" anchor="ctr"/>
-          <a:lstStyle/>
-          <a:p>
-            <a:pPr algn="ctr"/>
-          </a:p>
-        </p:txBody>
-      </p:sp>
-      <p:sp>
-        <p:nvSpPr>
-          <p:cNvPr id="10" name="Rounded Rectangle 9"/>
-          <p:cNvSpPr/>
-          <p:nvPr/>
-        </p:nvSpPr>
-        <p:spPr>
-          <a:xfrm>
-            <a:off x="594360" y="2272284"/>
-            <a:ext cx="438912" cy="438912"/>
-          </a:xfrm>
-          <a:prstGeom prst="roundRect">
-            <a:avLst>
-              <a:gd name="adj" fmla="val 12000"/>
-            </a:avLst>
-          </a:prstGeom>
-          <a:solidFill>
-            <a:srgbClr val="095292"/>
-          </a:solidFill>
-          <a:ln>
-            <a:noFill/>
-          </a:ln>
-        </p:spPr>
-        <p:style>
-          <a:lnRef idx="1">
-            <a:schemeClr val="accent1"/>
-          </a:lnRef>
-          <a:fillRef idx="3">
-            <a:schemeClr val="accent1"/>
-          </a:fillRef>
-          <a:effectRef idx="2">
-            <a:schemeClr val="accent1"/>
-          </a:effectRef>
-          <a:fontRef idx="minor">
-            <a:schemeClr val="lt1"/>
-          </a:fontRef>
-        </p:style>
-        <p:txBody>
-          <a:bodyPr rtlCol="0" anchor="ctr"/>
-          <a:lstStyle/>
-          <a:p>
-            <a:pPr algn="ctr"/>
-          </a:p>
-        </p:txBody>
-      </p:sp>
-      <p:sp>
-        <p:nvSpPr>
-          <p:cNvPr id="11" name="TextBox 10"/>
-          <p:cNvSpPr txBox="1"/>
-          <p:nvPr/>
-        </p:nvSpPr>
-        <p:spPr>
-          <a:xfrm>
-            <a:off x="594360" y="2272284"/>
-            <a:ext cx="438912" cy="438912"/>
-          </a:xfrm>
-          <a:prstGeom prst="rect">
-            <a:avLst/>
-          </a:prstGeom>
-          <a:noFill/>
-        </p:spPr>
-        <p:txBody>
-          <a:bodyPr wrap="square" anchor="ctr"/>
-          <a:lstStyle/>
-          <a:p>
-            <a:pPr algn="ctr"/>
-            <a:r>
-              <a:rPr sz="1600" b="1" i="0">
-                <a:solidFill>
-                  <a:srgbClr val="FFFFFF"/>
-                </a:solidFill>
-                <a:latin typeface="Calibri"/>
-              </a:rPr>
-              <a:t>2</a:t>
-            </a:r>
-          </a:p>
-        </p:txBody>
-      </p:sp>
-      <p:sp>
-        <p:nvSpPr>
-          <p:cNvPr id="12" name="TextBox 11"/>
-          <p:cNvSpPr txBox="1"/>
-          <p:nvPr/>
-        </p:nvSpPr>
-        <p:spPr>
-          <a:xfrm>
-            <a:off x="1188720" y="2194560"/>
-            <a:ext cx="10271455" cy="612647"/>
-          </a:xfrm>
-          <a:prstGeom prst="rect">
-            <a:avLst/>
-          </a:prstGeom>
-          <a:noFill/>
-        </p:spPr>
-        <p:txBody>
-          <a:bodyPr wrap="square" anchor="ctr"/>
-          <a:lstStyle/>
-          <a:p>
-            <a:r>
-              <a:rPr sz="1500" b="1" i="0">
-                <a:solidFill>
-                  <a:srgbClr val="095292"/>
-                </a:solidFill>
-                <a:latin typeface="Calibri"/>
-              </a:rPr>
-              <a:t>Diagrama flujo app-&gt;BD (Excalidraw) opcional.</a:t>
-            </a:r>
-          </a:p>
-        </p:txBody>
-      </p:sp>
-      <p:sp>
-        <p:nvSpPr>
-          <p:cNvPr id="13" name="Rounded Rectangle 12"/>
-          <p:cNvSpPr/>
-          <p:nvPr/>
-        </p:nvSpPr>
-        <p:spPr>
-          <a:xfrm>
-            <a:off x="457200" y="2971800"/>
-            <a:ext cx="11277295" cy="777240"/>
-          </a:xfrm>
-          <a:prstGeom prst="roundRect">
-            <a:avLst>
-              <a:gd name="adj" fmla="val 12000"/>
-            </a:avLst>
-          </a:prstGeom>
-          <a:solidFill>
-            <a:srgbClr val="F2F2F2"/>
-          </a:solidFill>
-          <a:ln>
-            <a:noFill/>
-          </a:ln>
-        </p:spPr>
-        <p:style>
-          <a:lnRef idx="1">
-            <a:schemeClr val="accent1"/>
-          </a:lnRef>
-          <a:fillRef idx="3">
-            <a:schemeClr val="accent1"/>
-          </a:fillRef>
-          <a:effectRef idx="2">
-            <a:schemeClr val="accent1"/>
-          </a:effectRef>
-          <a:fontRef idx="minor">
-            <a:schemeClr val="lt1"/>
-          </a:fontRef>
-        </p:style>
-        <p:txBody>
-          <a:bodyPr rtlCol="0" anchor="ctr"/>
-          <a:lstStyle/>
-          <a:p>
-            <a:pPr algn="ctr"/>
-          </a:p>
-        </p:txBody>
-      </p:sp>
-      <p:sp>
-        <p:nvSpPr>
-          <p:cNvPr id="14" name="Rounded Rectangle 13"/>
-          <p:cNvSpPr/>
-          <p:nvPr/>
-        </p:nvSpPr>
-        <p:spPr>
-          <a:xfrm>
-            <a:off x="594360" y="3140964"/>
-            <a:ext cx="438912" cy="438912"/>
-          </a:xfrm>
-          <a:prstGeom prst="roundRect">
-            <a:avLst>
-              <a:gd name="adj" fmla="val 12000"/>
-            </a:avLst>
-          </a:prstGeom>
-          <a:solidFill>
-            <a:srgbClr val="095292"/>
-          </a:solidFill>
-          <a:ln>
-            <a:noFill/>
-          </a:ln>
-        </p:spPr>
-        <p:style>
-          <a:lnRef idx="1">
-            <a:schemeClr val="accent1"/>
-          </a:lnRef>
-          <a:fillRef idx="3">
-            <a:schemeClr val="accent1"/>
-          </a:fillRef>
-          <a:effectRef idx="2">
-            <a:schemeClr val="accent1"/>
-          </a:effectRef>
-          <a:fontRef idx="minor">
-            <a:schemeClr val="lt1"/>
-          </a:fontRef>
-        </p:style>
-        <p:txBody>
-          <a:bodyPr rtlCol="0" anchor="ctr"/>
-          <a:lstStyle/>
-          <a:p>
-            <a:pPr algn="ctr"/>
-          </a:p>
-        </p:txBody>
-      </p:sp>
-      <p:sp>
-        <p:nvSpPr>
-          <p:cNvPr id="15" name="TextBox 14"/>
-          <p:cNvSpPr txBox="1"/>
-          <p:nvPr/>
-        </p:nvSpPr>
-        <p:spPr>
-          <a:xfrm>
-            <a:off x="594360" y="3140964"/>
-            <a:ext cx="438912" cy="438912"/>
-          </a:xfrm>
-          <a:prstGeom prst="rect">
-            <a:avLst/>
-          </a:prstGeom>
-          <a:noFill/>
-        </p:spPr>
-        <p:txBody>
-          <a:bodyPr wrap="square" anchor="ctr"/>
-          <a:lstStyle/>
-          <a:p>
-            <a:pPr algn="ctr"/>
-            <a:r>
-              <a:rPr sz="1600" b="1" i="0">
-                <a:solidFill>
-                  <a:srgbClr val="FFFFFF"/>
-                </a:solidFill>
-                <a:latin typeface="Calibri"/>
-              </a:rPr>
-              <a:t>3</a:t>
-            </a:r>
-          </a:p>
-        </p:txBody>
-      </p:sp>
-      <p:sp>
-        <p:nvSpPr>
-          <p:cNvPr id="16" name="TextBox 15"/>
-          <p:cNvSpPr txBox="1"/>
-          <p:nvPr/>
-        </p:nvSpPr>
-        <p:spPr>
-          <a:xfrm>
-            <a:off x="1188720" y="3063240"/>
-            <a:ext cx="10271455" cy="612647"/>
-          </a:xfrm>
-          <a:prstGeom prst="rect">
-            <a:avLst/>
-          </a:prstGeom>
-          <a:noFill/>
-        </p:spPr>
-        <p:txBody>
-          <a:bodyPr wrap="square" anchor="ctr"/>
-          <a:lstStyle/>
-          <a:p>
-            <a:r>
-              <a:rPr sz="1500" b="1" i="0">
-                <a:solidFill>
-                  <a:srgbClr val="095292"/>
-                </a:solidFill>
-                <a:latin typeface="Calibri"/>
-              </a:rPr>
-              <a:t>Outline presentacion 5-8 min + quien habla que.</a:t>
-            </a:r>
-          </a:p>
-        </p:txBody>
-      </p:sp>
-      <p:sp>
-        <p:nvSpPr>
-          <p:cNvPr id="17" name="Rounded Rectangle 16"/>
-          <p:cNvSpPr/>
-          <p:nvPr/>
-        </p:nvSpPr>
-        <p:spPr>
-          <a:xfrm>
-            <a:off x="457200" y="3840479"/>
-            <a:ext cx="11277295" cy="777240"/>
-          </a:xfrm>
-          <a:prstGeom prst="roundRect">
-            <a:avLst>
-              <a:gd name="adj" fmla="val 12000"/>
-            </a:avLst>
-          </a:prstGeom>
-          <a:solidFill>
-            <a:srgbClr val="E8F4FA"/>
-          </a:solidFill>
-          <a:ln>
-            <a:noFill/>
-          </a:ln>
-        </p:spPr>
-        <p:style>
-          <a:lnRef idx="1">
-            <a:schemeClr val="accent1"/>
-          </a:lnRef>
-          <a:fillRef idx="3">
-            <a:schemeClr val="accent1"/>
-          </a:fillRef>
-          <a:effectRef idx="2">
-            <a:schemeClr val="accent1"/>
-          </a:effectRef>
-          <a:fontRef idx="minor">
-            <a:schemeClr val="lt1"/>
-          </a:fontRef>
-        </p:style>
-        <p:txBody>
-          <a:bodyPr rtlCol="0" anchor="ctr"/>
-          <a:lstStyle/>
-          <a:p>
-            <a:pPr algn="ctr"/>
-          </a:p>
-        </p:txBody>
-      </p:sp>
-      <p:sp>
-        <p:nvSpPr>
-          <p:cNvPr id="18" name="Rounded Rectangle 17"/>
-          <p:cNvSpPr/>
-          <p:nvPr/>
-        </p:nvSpPr>
-        <p:spPr>
-          <a:xfrm>
-            <a:off x="594360" y="4009643"/>
-            <a:ext cx="438912" cy="438912"/>
-          </a:xfrm>
-          <a:prstGeom prst="roundRect">
-            <a:avLst>
-              <a:gd name="adj" fmla="val 12000"/>
-            </a:avLst>
-          </a:prstGeom>
-          <a:solidFill>
-            <a:srgbClr val="095292"/>
-          </a:solidFill>
-          <a:ln>
-            <a:noFill/>
-          </a:ln>
-        </p:spPr>
-        <p:style>
-          <a:lnRef idx="1">
-            <a:schemeClr val="accent1"/>
-          </a:lnRef>
-          <a:fillRef idx="3">
-            <a:schemeClr val="accent1"/>
-          </a:fillRef>
-          <a:effectRef idx="2">
-            <a:schemeClr val="accent1"/>
-          </a:effectRef>
-          <a:fontRef idx="minor">
-            <a:schemeClr val="lt1"/>
-          </a:fontRef>
-        </p:style>
-        <p:txBody>
-          <a:bodyPr rtlCol="0" anchor="ctr"/>
-          <a:lstStyle/>
-          <a:p>
-            <a:pPr algn="ctr"/>
-          </a:p>
-        </p:txBody>
-      </p:sp>
-      <p:sp>
-        <p:nvSpPr>
-          <p:cNvPr id="19" name="TextBox 18"/>
-          <p:cNvSpPr txBox="1"/>
-          <p:nvPr/>
-        </p:nvSpPr>
-        <p:spPr>
-          <a:xfrm>
-            <a:off x="594360" y="4009643"/>
-            <a:ext cx="438912" cy="438912"/>
-          </a:xfrm>
-          <a:prstGeom prst="rect">
-            <a:avLst/>
-          </a:prstGeom>
-          <a:noFill/>
-        </p:spPr>
-        <p:txBody>
-          <a:bodyPr wrap="square" anchor="ctr"/>
-          <a:lstStyle/>
-          <a:p>
-            <a:pPr algn="ctr"/>
-            <a:r>
-              <a:rPr sz="1600" b="1" i="0">
-                <a:solidFill>
-                  <a:srgbClr val="FFFFFF"/>
-                </a:solidFill>
-                <a:latin typeface="Calibri"/>
-              </a:rPr>
-              <a:t>4</a:t>
-            </a:r>
-          </a:p>
-        </p:txBody>
-      </p:sp>
-      <p:sp>
-        <p:nvSpPr>
-          <p:cNvPr id="20" name="TextBox 19"/>
-          <p:cNvSpPr txBox="1"/>
-          <p:nvPr/>
-        </p:nvSpPr>
-        <p:spPr>
-          <a:xfrm>
-            <a:off x="1188720" y="3931919"/>
-            <a:ext cx="10271455" cy="612647"/>
-          </a:xfrm>
-          <a:prstGeom prst="rect">
-            <a:avLst/>
-          </a:prstGeom>
-          <a:noFill/>
-        </p:spPr>
-        <p:txBody>
-          <a:bodyPr wrap="square" anchor="ctr"/>
-          <a:lstStyle/>
-          <a:p>
-            <a:r>
-              <a:rPr sz="1500" b="1" i="0">
-                <a:solidFill>
-                  <a:srgbClr val="095292"/>
-                </a:solidFill>
-                <a:latin typeface="Calibri"/>
-              </a:rPr>
-              <a:t>Empaquetar borrador entrega final.</a:t>
-            </a:r>
-          </a:p>
-        </p:txBody>
-      </p:sp>
-      <p:sp>
-        <p:nvSpPr>
-          <p:cNvPr id="21" name="TextBox 20"/>
+          <a:bodyPr wrap="square">
+            <a:spAutoFit/>
+          </a:bodyPr>
+          <a:lstStyle/>
+          <a:p>
+            <a:pPr>
+              <a:spcAft>
+                <a:spcPts val="800"/>
+              </a:spcAft>
+            </a:pPr>
+            <a:r>
+              <a:rPr sz="1600" b="0" i="0">
+                <a:solidFill>
+                  <a:srgbClr val="333333"/>
+                </a:solidFill>
+                <a:latin typeface="Calibri"/>
+              </a:rPr>
+              <a:t>–   Plantilla sp_agendar_cita / consulta / facturar.</a:t>
+            </a:r>
+          </a:p>
+        </p:txBody>
+      </p:sp>
+      <p:sp>
+        <p:nvSpPr>
+          <p:cNvPr id="6" name="TextBox 5"/>
           <p:cNvSpPr txBox="1"/>
           <p:nvPr/>
         </p:nvSpPr>
@@ -4641,7 +4215,7 @@
                 </a:solidFill>
                 <a:latin typeface="Calibri"/>
               </a:rPr>
-              <a:t>Taller PI VetCare — pistas (checklist vacio)</a:t>
+              <a:t>Taller PI VetCare — pasos guiados</a:t>
             </a:r>
           </a:p>
         </p:txBody>
@@ -4654,8 +4228,8 @@
         </p:nvSpPr>
         <p:spPr>
           <a:xfrm>
-            <a:off x="457200" y="1261872"/>
-            <a:ext cx="11277295" cy="566928"/>
+            <a:off x="457200" y="1554480"/>
+            <a:ext cx="11277295" cy="1051560"/>
           </a:xfrm>
           <a:prstGeom prst="roundRect">
             <a:avLst>
@@ -4693,25 +4267,25 @@
       </p:sp>
       <p:sp>
         <p:nvSpPr>
-          <p:cNvPr id="6" name="Rectangle 5"/>
+          <p:cNvPr id="6" name="Rounded Rectangle 5"/>
           <p:cNvSpPr/>
           <p:nvPr/>
         </p:nvSpPr>
         <p:spPr>
           <a:xfrm>
-            <a:off x="640080" y="1408175"/>
-            <a:ext cx="274320" cy="274320"/>
-          </a:xfrm>
-          <a:prstGeom prst="rect">
-            <a:avLst/>
+            <a:off x="594360" y="1860804"/>
+            <a:ext cx="438912" cy="438912"/>
+          </a:xfrm>
+          <a:prstGeom prst="roundRect">
+            <a:avLst>
+              <a:gd name="adj" fmla="val 12000"/>
+            </a:avLst>
           </a:prstGeom>
           <a:solidFill>
-            <a:srgbClr val="FFFFFF"/>
+            <a:srgbClr val="095292"/>
           </a:solidFill>
           <a:ln>
-            <a:solidFill>
-              <a:srgbClr val="333333"/>
-            </a:solidFill>
+            <a:noFill/>
           </a:ln>
         </p:spPr>
         <p:style>
@@ -4738,20 +4312,87 @@
       </p:sp>
       <p:sp>
         <p:nvSpPr>
-          <p:cNvPr id="7" name="Rectangle 6"/>
+          <p:cNvPr id="7" name="TextBox 6"/>
+          <p:cNvSpPr txBox="1"/>
+          <p:nvPr/>
+        </p:nvSpPr>
+        <p:spPr>
+          <a:xfrm>
+            <a:off x="594360" y="1860804"/>
+            <a:ext cx="438912" cy="438912"/>
+          </a:xfrm>
+          <a:prstGeom prst="rect">
+            <a:avLst/>
+          </a:prstGeom>
+          <a:noFill/>
+        </p:spPr>
+        <p:txBody>
+          <a:bodyPr wrap="square" anchor="ctr"/>
+          <a:lstStyle/>
+          <a:p>
+            <a:pPr algn="ctr"/>
+            <a:r>
+              <a:rPr sz="1600" b="1" i="0">
+                <a:solidFill>
+                  <a:srgbClr val="FFFFFF"/>
+                </a:solidFill>
+                <a:latin typeface="Calibri"/>
+              </a:rPr>
+              <a:t>1</a:t>
+            </a:r>
+          </a:p>
+        </p:txBody>
+      </p:sp>
+      <p:sp>
+        <p:nvSpPr>
+          <p:cNvPr id="8" name="TextBox 7"/>
+          <p:cNvSpPr txBox="1"/>
+          <p:nvPr/>
+        </p:nvSpPr>
+        <p:spPr>
+          <a:xfrm>
+            <a:off x="1188720" y="1645920"/>
+            <a:ext cx="10271455" cy="886968"/>
+          </a:xfrm>
+          <a:prstGeom prst="rect">
+            <a:avLst/>
+          </a:prstGeom>
+          <a:noFill/>
+        </p:spPr>
+        <p:txBody>
+          <a:bodyPr wrap="square" anchor="ctr"/>
+          <a:lstStyle/>
+          <a:p>
+            <a:r>
+              <a:rPr sz="1500" b="1" i="0">
+                <a:solidFill>
+                  <a:srgbClr val="095292"/>
+                </a:solidFill>
+                <a:latin typeface="Calibri"/>
+              </a:rPr>
+              <a:t>Redactar contrato de &gt;=3 operaciones.</a:t>
+            </a:r>
+          </a:p>
+        </p:txBody>
+      </p:sp>
+      <p:sp>
+        <p:nvSpPr>
+          <p:cNvPr id="9" name="Rounded Rectangle 8"/>
           <p:cNvSpPr/>
           <p:nvPr/>
         </p:nvSpPr>
         <p:spPr>
           <a:xfrm>
-            <a:off x="640080" y="1408175"/>
-            <a:ext cx="73152" cy="274320"/>
-          </a:xfrm>
-          <a:prstGeom prst="rect">
-            <a:avLst/>
+            <a:off x="457200" y="2697480"/>
+            <a:ext cx="11277295" cy="1051560"/>
+          </a:xfrm>
+          <a:prstGeom prst="roundRect">
+            <a:avLst>
+              <a:gd name="adj" fmla="val 12000"/>
+            </a:avLst>
           </a:prstGeom>
           <a:solidFill>
-            <a:srgbClr val="269CCB"/>
+            <a:srgbClr val="E8F4FA"/>
           </a:solidFill>
           <a:ln>
             <a:noFill/>
@@ -4781,14 +4422,59 @@
       </p:sp>
       <p:sp>
         <p:nvSpPr>
-          <p:cNvPr id="8" name="TextBox 7"/>
+          <p:cNvPr id="10" name="Rounded Rectangle 9"/>
+          <p:cNvSpPr/>
+          <p:nvPr/>
+        </p:nvSpPr>
+        <p:spPr>
+          <a:xfrm>
+            <a:off x="594360" y="3003804"/>
+            <a:ext cx="438912" cy="438912"/>
+          </a:xfrm>
+          <a:prstGeom prst="roundRect">
+            <a:avLst>
+              <a:gd name="adj" fmla="val 12000"/>
+            </a:avLst>
+          </a:prstGeom>
+          <a:solidFill>
+            <a:srgbClr val="095292"/>
+          </a:solidFill>
+          <a:ln>
+            <a:noFill/>
+          </a:ln>
+        </p:spPr>
+        <p:style>
+          <a:lnRef idx="1">
+            <a:schemeClr val="accent1"/>
+          </a:lnRef>
+          <a:fillRef idx="3">
+            <a:schemeClr val="accent1"/>
+          </a:fillRef>
+          <a:effectRef idx="2">
+            <a:schemeClr val="accent1"/>
+          </a:effectRef>
+          <a:fontRef idx="minor">
+            <a:schemeClr val="lt1"/>
+          </a:fontRef>
+        </p:style>
+        <p:txBody>
+          <a:bodyPr rtlCol="0" anchor="ctr"/>
+          <a:lstStyle/>
+          <a:p>
+            <a:pPr algn="ctr"/>
+          </a:p>
+        </p:txBody>
+      </p:sp>
+      <p:sp>
+        <p:nvSpPr>
+          <p:cNvPr id="11" name="TextBox 10"/>
           <p:cNvSpPr txBox="1"/>
           <p:nvPr/>
         </p:nvSpPr>
         <p:spPr>
           <a:xfrm>
-            <a:off x="1097280" y="1353312"/>
-            <a:ext cx="10362895" cy="402336"/>
+            <a:off x="594360" y="3003804"/>
+            <a:ext cx="438912" cy="438912"/>
           </a:xfrm>
           <a:prstGeom prst="rect">
             <a:avLst/>
@@ -4799,28 +4485,61 @@
           <a:bodyPr wrap="square" anchor="ctr"/>
           <a:lstStyle/>
           <a:p>
-            <a:r>
-              <a:rPr sz="1500" b="0" i="0">
-                <a:solidFill>
-                  <a:srgbClr val="333333"/>
-                </a:solidFill>
-                <a:latin typeface="Calibri"/>
-              </a:rPr>
-              <a:t>□ &gt;=3 ops?</a:t>
-            </a:r>
-          </a:p>
-        </p:txBody>
-      </p:sp>
-      <p:sp>
-        <p:nvSpPr>
-          <p:cNvPr id="9" name="Rounded Rectangle 8"/>
+            <a:pPr algn="ctr"/>
+            <a:r>
+              <a:rPr sz="1600" b="1" i="0">
+                <a:solidFill>
+                  <a:srgbClr val="FFFFFF"/>
+                </a:solidFill>
+                <a:latin typeface="Calibri"/>
+              </a:rPr>
+              <a:t>2</a:t>
+            </a:r>
+          </a:p>
+        </p:txBody>
+      </p:sp>
+      <p:sp>
+        <p:nvSpPr>
+          <p:cNvPr id="12" name="TextBox 11"/>
+          <p:cNvSpPr txBox="1"/>
+          <p:nvPr/>
+        </p:nvSpPr>
+        <p:spPr>
+          <a:xfrm>
+            <a:off x="1188720" y="2788920"/>
+            <a:ext cx="10271455" cy="886968"/>
+          </a:xfrm>
+          <a:prstGeom prst="rect">
+            <a:avLst/>
+          </a:prstGeom>
+          <a:noFill/>
+        </p:spPr>
+        <p:txBody>
+          <a:bodyPr wrap="square" anchor="ctr"/>
+          <a:lstStyle/>
+          <a:p>
+            <a:r>
+              <a:rPr sz="1500" b="1" i="0">
+                <a:solidFill>
+                  <a:srgbClr val="095292"/>
+                </a:solidFill>
+                <a:latin typeface="Calibri"/>
+              </a:rPr>
+              <a:t>Diagrama flujo app-&gt;BD (Excalidraw) opcional.</a:t>
+            </a:r>
+          </a:p>
+        </p:txBody>
+      </p:sp>
+      <p:sp>
+        <p:nvSpPr>
+          <p:cNvPr id="13" name="Rounded Rectangle 12"/>
           <p:cNvSpPr/>
           <p:nvPr/>
         </p:nvSpPr>
         <p:spPr>
           <a:xfrm>
-            <a:off x="457200" y="1938528"/>
-            <a:ext cx="11277295" cy="566928"/>
+            <a:off x="457200" y="3840480"/>
+            <a:ext cx="11277295" cy="1051560"/>
           </a:xfrm>
           <a:prstGeom prst="roundRect">
             <a:avLst>
@@ -4858,25 +4577,25 @@
       </p:sp>
       <p:sp>
         <p:nvSpPr>
-          <p:cNvPr id="10" name="Rectangle 9"/>
+          <p:cNvPr id="14" name="Rounded Rectangle 13"/>
           <p:cNvSpPr/>
           <p:nvPr/>
         </p:nvSpPr>
         <p:spPr>
           <a:xfrm>
-            <a:off x="640080" y="2084832"/>
-            <a:ext cx="274320" cy="274320"/>
-          </a:xfrm>
-          <a:prstGeom prst="rect">
-            <a:avLst/>
+            <a:off x="594360" y="4146804"/>
+            <a:ext cx="438912" cy="438912"/>
+          </a:xfrm>
+          <a:prstGeom prst="roundRect">
+            <a:avLst>
+              <a:gd name="adj" fmla="val 12000"/>
+            </a:avLst>
           </a:prstGeom>
           <a:solidFill>
-            <a:srgbClr val="FFFFFF"/>
+            <a:srgbClr val="095292"/>
           </a:solidFill>
           <a:ln>
-            <a:solidFill>
-              <a:srgbClr val="333333"/>
-            </a:solidFill>
+            <a:noFill/>
           </a:ln>
         </p:spPr>
         <p:style>
@@ -4903,20 +4622,87 @@
       </p:sp>
       <p:sp>
         <p:nvSpPr>
-          <p:cNvPr id="11" name="Rectangle 10"/>
+          <p:cNvPr id="15" name="TextBox 14"/>
+          <p:cNvSpPr txBox="1"/>
+          <p:nvPr/>
+        </p:nvSpPr>
+        <p:spPr>
+          <a:xfrm>
+            <a:off x="594360" y="4146804"/>
+            <a:ext cx="438912" cy="438912"/>
+          </a:xfrm>
+          <a:prstGeom prst="rect">
+            <a:avLst/>
+          </a:prstGeom>
+          <a:noFill/>
+        </p:spPr>
+        <p:txBody>
+          <a:bodyPr wrap="square" anchor="ctr"/>
+          <a:lstStyle/>
+          <a:p>
+            <a:pPr algn="ctr"/>
+            <a:r>
+              <a:rPr sz="1600" b="1" i="0">
+                <a:solidFill>
+                  <a:srgbClr val="FFFFFF"/>
+                </a:solidFill>
+                <a:latin typeface="Calibri"/>
+              </a:rPr>
+              <a:t>3</a:t>
+            </a:r>
+          </a:p>
+        </p:txBody>
+      </p:sp>
+      <p:sp>
+        <p:nvSpPr>
+          <p:cNvPr id="16" name="TextBox 15"/>
+          <p:cNvSpPr txBox="1"/>
+          <p:nvPr/>
+        </p:nvSpPr>
+        <p:spPr>
+          <a:xfrm>
+            <a:off x="1188720" y="3931920"/>
+            <a:ext cx="10271455" cy="886968"/>
+          </a:xfrm>
+          <a:prstGeom prst="rect">
+            <a:avLst/>
+          </a:prstGeom>
+          <a:noFill/>
+        </p:spPr>
+        <p:txBody>
+          <a:bodyPr wrap="square" anchor="ctr"/>
+          <a:lstStyle/>
+          <a:p>
+            <a:r>
+              <a:rPr sz="1500" b="1" i="0">
+                <a:solidFill>
+                  <a:srgbClr val="095292"/>
+                </a:solidFill>
+                <a:latin typeface="Calibri"/>
+              </a:rPr>
+              <a:t>Outline presentacion 5-8 min + quien habla que.</a:t>
+            </a:r>
+          </a:p>
+        </p:txBody>
+      </p:sp>
+      <p:sp>
+        <p:nvSpPr>
+          <p:cNvPr id="17" name="Rounded Rectangle 16"/>
           <p:cNvSpPr/>
           <p:nvPr/>
         </p:nvSpPr>
         <p:spPr>
           <a:xfrm>
-            <a:off x="640080" y="2084832"/>
-            <a:ext cx="73152" cy="274320"/>
-          </a:xfrm>
-          <a:prstGeom prst="rect">
-            <a:avLst/>
+            <a:off x="457200" y="4983480"/>
+            <a:ext cx="11277295" cy="1051560"/>
+          </a:xfrm>
+          <a:prstGeom prst="roundRect">
+            <a:avLst>
+              <a:gd name="adj" fmla="val 12000"/>
+            </a:avLst>
           </a:prstGeom>
           <a:solidFill>
-            <a:srgbClr val="269CCB"/>
+            <a:srgbClr val="E8F4FA"/>
           </a:solidFill>
           <a:ln>
             <a:noFill/>
@@ -4946,46 +4732,14 @@
       </p:sp>
       <p:sp>
         <p:nvSpPr>
-          <p:cNvPr id="12" name="TextBox 11"/>
-          <p:cNvSpPr txBox="1"/>
-          <p:nvPr/>
-        </p:nvSpPr>
-        <p:spPr>
-          <a:xfrm>
-            <a:off x="1097280" y="2029968"/>
-            <a:ext cx="10362895" cy="402336"/>
-          </a:xfrm>
-          <a:prstGeom prst="rect">
-            <a:avLst/>
-          </a:prstGeom>
-          <a:noFill/>
-        </p:spPr>
-        <p:txBody>
-          <a:bodyPr wrap="square" anchor="ctr"/>
-          <a:lstStyle/>
-          <a:p>
-            <a:r>
-              <a:rPr sz="1500" b="0" i="0">
-                <a:solidFill>
-                  <a:srgbClr val="333333"/>
-                </a:solidFill>
-                <a:latin typeface="Calibri"/>
-              </a:rPr>
-              <a:t>□ Errores esperados?</a:t>
-            </a:r>
-          </a:p>
-        </p:txBody>
-      </p:sp>
-      <p:sp>
-        <p:nvSpPr>
-          <p:cNvPr id="13" name="Rounded Rectangle 12"/>
+          <p:cNvPr id="18" name="Rounded Rectangle 17"/>
           <p:cNvSpPr/>
           <p:nvPr/>
         </p:nvSpPr>
         <p:spPr>
           <a:xfrm>
-            <a:off x="457200" y="2615184"/>
-            <a:ext cx="11277295" cy="566928"/>
+            <a:off x="594360" y="5289804"/>
+            <a:ext cx="438912" cy="438912"/>
           </a:xfrm>
           <a:prstGeom prst="roundRect">
             <a:avLst>
@@ -4993,7 +4747,7 @@
             </a:avLst>
           </a:prstGeom>
           <a:solidFill>
-            <a:srgbClr val="F2F2F2"/>
+            <a:srgbClr val="095292"/>
           </a:solidFill>
           <a:ln>
             <a:noFill/>
@@ -5023,102 +4777,47 @@
       </p:sp>
       <p:sp>
         <p:nvSpPr>
-          <p:cNvPr id="14" name="Rectangle 13"/>
-          <p:cNvSpPr/>
-          <p:nvPr/>
-        </p:nvSpPr>
-        <p:spPr>
-          <a:xfrm>
-            <a:off x="640080" y="2761488"/>
-            <a:ext cx="274320" cy="274320"/>
-          </a:xfrm>
-          <a:prstGeom prst="rect">
-            <a:avLst/>
-          </a:prstGeom>
-          <a:solidFill>
-            <a:srgbClr val="FFFFFF"/>
-          </a:solidFill>
-          <a:ln>
-            <a:solidFill>
-              <a:srgbClr val="333333"/>
-            </a:solidFill>
-          </a:ln>
-        </p:spPr>
-        <p:style>
-          <a:lnRef idx="1">
-            <a:schemeClr val="accent1"/>
-          </a:lnRef>
-          <a:fillRef idx="3">
-            <a:schemeClr val="accent1"/>
-          </a:fillRef>
-          <a:effectRef idx="2">
-            <a:schemeClr val="accent1"/>
-          </a:effectRef>
-          <a:fontRef idx="minor">
-            <a:schemeClr val="lt1"/>
-          </a:fontRef>
-        </p:style>
-        <p:txBody>
-          <a:bodyPr rtlCol="0" anchor="ctr"/>
+          <p:cNvPr id="19" name="TextBox 18"/>
+          <p:cNvSpPr txBox="1"/>
+          <p:nvPr/>
+        </p:nvSpPr>
+        <p:spPr>
+          <a:xfrm>
+            <a:off x="594360" y="5289804"/>
+            <a:ext cx="438912" cy="438912"/>
+          </a:xfrm>
+          <a:prstGeom prst="rect">
+            <a:avLst/>
+          </a:prstGeom>
+          <a:noFill/>
+        </p:spPr>
+        <p:txBody>
+          <a:bodyPr wrap="square" anchor="ctr"/>
           <a:lstStyle/>
           <a:p>
             <a:pPr algn="ctr"/>
-          </a:p>
-        </p:txBody>
-      </p:sp>
-      <p:sp>
-        <p:nvSpPr>
-          <p:cNvPr id="15" name="Rectangle 14"/>
-          <p:cNvSpPr/>
-          <p:nvPr/>
-        </p:nvSpPr>
-        <p:spPr>
-          <a:xfrm>
-            <a:off x="640080" y="2761488"/>
-            <a:ext cx="73152" cy="274320"/>
-          </a:xfrm>
-          <a:prstGeom prst="rect">
-            <a:avLst/>
-          </a:prstGeom>
-          <a:solidFill>
-            <a:srgbClr val="269CCB"/>
-          </a:solidFill>
-          <a:ln>
-            <a:noFill/>
-          </a:ln>
-        </p:spPr>
-        <p:style>
-          <a:lnRef idx="1">
-            <a:schemeClr val="accent1"/>
-          </a:lnRef>
-          <a:fillRef idx="3">
-            <a:schemeClr val="accent1"/>
-          </a:fillRef>
-          <a:effectRef idx="2">
-            <a:schemeClr val="accent1"/>
-          </a:effectRef>
-          <a:fontRef idx="minor">
-            <a:schemeClr val="lt1"/>
-          </a:fontRef>
-        </p:style>
-        <p:txBody>
-          <a:bodyPr rtlCol="0" anchor="ctr"/>
-          <a:lstStyle/>
-          <a:p>
-            <a:pPr algn="ctr"/>
-          </a:p>
-        </p:txBody>
-      </p:sp>
-      <p:sp>
-        <p:nvSpPr>
-          <p:cNvPr id="16" name="TextBox 15"/>
+            <a:r>
+              <a:rPr sz="1600" b="1" i="0">
+                <a:solidFill>
+                  <a:srgbClr val="FFFFFF"/>
+                </a:solidFill>
+                <a:latin typeface="Calibri"/>
+              </a:rPr>
+              <a:t>4</a:t>
+            </a:r>
+          </a:p>
+        </p:txBody>
+      </p:sp>
+      <p:sp>
+        <p:nvSpPr>
+          <p:cNvPr id="20" name="TextBox 19"/>
           <p:cNvSpPr txBox="1"/>
           <p:nvPr/>
         </p:nvSpPr>
         <p:spPr>
           <a:xfrm>
-            <a:off x="1097280" y="2706624"/>
-            <a:ext cx="10362895" cy="402336"/>
+            <a:off x="1188720" y="5074920"/>
+            <a:ext cx="10271455" cy="886968"/>
           </a:xfrm>
           <a:prstGeom prst="rect">
             <a:avLst/>
@@ -5130,20 +4829,20 @@
           <a:lstStyle/>
           <a:p>
             <a:r>
-              <a:rPr sz="1500" b="0" i="0">
-                <a:solidFill>
-                  <a:srgbClr val="333333"/>
-                </a:solidFill>
-                <a:latin typeface="Calibri"/>
-              </a:rPr>
-              <a:t>□ Outline completo?</a:t>
-            </a:r>
-          </a:p>
-        </p:txBody>
-      </p:sp>
-      <p:sp>
-        <p:nvSpPr>
-          <p:cNvPr id="17" name="TextBox 16"/>
+              <a:rPr sz="1500" b="1" i="0">
+                <a:solidFill>
+                  <a:srgbClr val="095292"/>
+                </a:solidFill>
+                <a:latin typeface="Calibri"/>
+              </a:rPr>
+              <a:t>Empaquetar borrador entrega final.</a:t>
+            </a:r>
+          </a:p>
+        </p:txBody>
+      </p:sp>
+      <p:sp>
+        <p:nvSpPr>
+          <p:cNvPr id="21" name="TextBox 20"/>
           <p:cNvSpPr txBox="1"/>
           <p:nvPr/>
         </p:nvSpPr>
@@ -5317,21 +5016,154 @@
                 </a:solidFill>
                 <a:latin typeface="Calibri"/>
               </a:rPr>
-              <a:t>Criterios de exito / entregable</a:t>
-            </a:r>
-          </a:p>
-        </p:txBody>
-      </p:sp>
-      <p:sp>
-        <p:nvSpPr>
-          <p:cNvPr id="5" name="TextBox 4"/>
+              <a:t>Taller PI VetCare — pistas (checklist vacio)</a:t>
+            </a:r>
+          </a:p>
+        </p:txBody>
+      </p:sp>
+      <p:sp>
+        <p:nvSpPr>
+          <p:cNvPr id="5" name="Rounded Rectangle 4"/>
+          <p:cNvSpPr/>
+          <p:nvPr/>
+        </p:nvSpPr>
+        <p:spPr>
+          <a:xfrm>
+            <a:off x="457200" y="1261872"/>
+            <a:ext cx="11277295" cy="566928"/>
+          </a:xfrm>
+          <a:prstGeom prst="roundRect">
+            <a:avLst>
+              <a:gd name="adj" fmla="val 12000"/>
+            </a:avLst>
+          </a:prstGeom>
+          <a:solidFill>
+            <a:srgbClr val="F2F2F2"/>
+          </a:solidFill>
+          <a:ln>
+            <a:noFill/>
+          </a:ln>
+        </p:spPr>
+        <p:style>
+          <a:lnRef idx="1">
+            <a:schemeClr val="accent1"/>
+          </a:lnRef>
+          <a:fillRef idx="3">
+            <a:schemeClr val="accent1"/>
+          </a:fillRef>
+          <a:effectRef idx="2">
+            <a:schemeClr val="accent1"/>
+          </a:effectRef>
+          <a:fontRef idx="minor">
+            <a:schemeClr val="lt1"/>
+          </a:fontRef>
+        </p:style>
+        <p:txBody>
+          <a:bodyPr rtlCol="0" anchor="ctr"/>
+          <a:lstStyle/>
+          <a:p>
+            <a:pPr algn="ctr"/>
+          </a:p>
+        </p:txBody>
+      </p:sp>
+      <p:sp>
+        <p:nvSpPr>
+          <p:cNvPr id="6" name="Rectangle 5"/>
+          <p:cNvSpPr/>
+          <p:nvPr/>
+        </p:nvSpPr>
+        <p:spPr>
+          <a:xfrm>
+            <a:off x="640080" y="1408175"/>
+            <a:ext cx="274320" cy="274320"/>
+          </a:xfrm>
+          <a:prstGeom prst="rect">
+            <a:avLst/>
+          </a:prstGeom>
+          <a:solidFill>
+            <a:srgbClr val="FFFFFF"/>
+          </a:solidFill>
+          <a:ln>
+            <a:solidFill>
+              <a:srgbClr val="333333"/>
+            </a:solidFill>
+          </a:ln>
+        </p:spPr>
+        <p:style>
+          <a:lnRef idx="1">
+            <a:schemeClr val="accent1"/>
+          </a:lnRef>
+          <a:fillRef idx="3">
+            <a:schemeClr val="accent1"/>
+          </a:fillRef>
+          <a:effectRef idx="2">
+            <a:schemeClr val="accent1"/>
+          </a:effectRef>
+          <a:fontRef idx="minor">
+            <a:schemeClr val="lt1"/>
+          </a:fontRef>
+        </p:style>
+        <p:txBody>
+          <a:bodyPr rtlCol="0" anchor="ctr"/>
+          <a:lstStyle/>
+          <a:p>
+            <a:pPr algn="ctr"/>
+          </a:p>
+        </p:txBody>
+      </p:sp>
+      <p:sp>
+        <p:nvSpPr>
+          <p:cNvPr id="7" name="Rectangle 6"/>
+          <p:cNvSpPr/>
+          <p:nvPr/>
+        </p:nvSpPr>
+        <p:spPr>
+          <a:xfrm>
+            <a:off x="640080" y="1408175"/>
+            <a:ext cx="73152" cy="274320"/>
+          </a:xfrm>
+          <a:prstGeom prst="rect">
+            <a:avLst/>
+          </a:prstGeom>
+          <a:solidFill>
+            <a:srgbClr val="269CCB"/>
+          </a:solidFill>
+          <a:ln>
+            <a:noFill/>
+          </a:ln>
+        </p:spPr>
+        <p:style>
+          <a:lnRef idx="1">
+            <a:schemeClr val="accent1"/>
+          </a:lnRef>
+          <a:fillRef idx="3">
+            <a:schemeClr val="accent1"/>
+          </a:fillRef>
+          <a:effectRef idx="2">
+            <a:schemeClr val="accent1"/>
+          </a:effectRef>
+          <a:fontRef idx="minor">
+            <a:schemeClr val="lt1"/>
+          </a:fontRef>
+        </p:style>
+        <p:txBody>
+          <a:bodyPr rtlCol="0" anchor="ctr"/>
+          <a:lstStyle/>
+          <a:p>
+            <a:pPr algn="ctr"/>
+          </a:p>
+        </p:txBody>
+      </p:sp>
+      <p:sp>
+        <p:nvSpPr>
+          <p:cNvPr id="8" name="TextBox 7"/>
           <p:cNvSpPr txBox="1"/>
           <p:nvPr/>
         </p:nvSpPr>
         <p:spPr>
           <a:xfrm>
-            <a:off x="457200" y="1170432"/>
-            <a:ext cx="11277295" cy="5230368"/>
+            <a:off x="1097280" y="1353312"/>
+            <a:ext cx="10362895" cy="402336"/>
           </a:xfrm>
           <a:prstGeom prst="rect">
             <a:avLst/>
@@ -5339,115 +5171,354 @@
           <a:noFill/>
         </p:spPr>
         <p:txBody>
-          <a:bodyPr wrap="square">
-            <a:spAutoFit/>
-          </a:bodyPr>
-          <a:lstStyle/>
-          <a:p>
-            <a:pPr>
-              <a:spcAft>
-                <a:spcPts val="800"/>
-              </a:spcAft>
-            </a:pPr>
-            <a:r>
-              <a:rPr sz="1600" b="0" i="0">
+          <a:bodyPr wrap="square" anchor="ctr"/>
+          <a:lstStyle/>
+          <a:p>
+            <a:r>
+              <a:rPr sz="1500" b="0" i="0">
                 <a:solidFill>
                   <a:srgbClr val="333333"/>
                 </a:solidFill>
                 <a:latin typeface="Calibri"/>
               </a:rPr>
-              <a:t>–   </a:t>
-            </a:r>
-            <a:r>
-              <a:rPr sz="1600" b="1" i="0">
+              <a:t>□ &gt;=3 ops?</a:t>
+            </a:r>
+          </a:p>
+        </p:txBody>
+      </p:sp>
+      <p:sp>
+        <p:nvSpPr>
+          <p:cNvPr id="9" name="Rounded Rectangle 8"/>
+          <p:cNvSpPr/>
+          <p:nvPr/>
+        </p:nvSpPr>
+        <p:spPr>
+          <a:xfrm>
+            <a:off x="457200" y="1938528"/>
+            <a:ext cx="11277295" cy="566928"/>
+          </a:xfrm>
+          <a:prstGeom prst="roundRect">
+            <a:avLst>
+              <a:gd name="adj" fmla="val 12000"/>
+            </a:avLst>
+          </a:prstGeom>
+          <a:solidFill>
+            <a:srgbClr val="F2F2F2"/>
+          </a:solidFill>
+          <a:ln>
+            <a:noFill/>
+          </a:ln>
+        </p:spPr>
+        <p:style>
+          <a:lnRef idx="1">
+            <a:schemeClr val="accent1"/>
+          </a:lnRef>
+          <a:fillRef idx="3">
+            <a:schemeClr val="accent1"/>
+          </a:fillRef>
+          <a:effectRef idx="2">
+            <a:schemeClr val="accent1"/>
+          </a:effectRef>
+          <a:fontRef idx="minor">
+            <a:schemeClr val="lt1"/>
+          </a:fontRef>
+        </p:style>
+        <p:txBody>
+          <a:bodyPr rtlCol="0" anchor="ctr"/>
+          <a:lstStyle/>
+          <a:p>
+            <a:pPr algn="ctr"/>
+          </a:p>
+        </p:txBody>
+      </p:sp>
+      <p:sp>
+        <p:nvSpPr>
+          <p:cNvPr id="10" name="Rectangle 9"/>
+          <p:cNvSpPr/>
+          <p:nvPr/>
+        </p:nvSpPr>
+        <p:spPr>
+          <a:xfrm>
+            <a:off x="640080" y="2084832"/>
+            <a:ext cx="274320" cy="274320"/>
+          </a:xfrm>
+          <a:prstGeom prst="rect">
+            <a:avLst/>
+          </a:prstGeom>
+          <a:solidFill>
+            <a:srgbClr val="FFFFFF"/>
+          </a:solidFill>
+          <a:ln>
+            <a:solidFill>
+              <a:srgbClr val="333333"/>
+            </a:solidFill>
+          </a:ln>
+        </p:spPr>
+        <p:style>
+          <a:lnRef idx="1">
+            <a:schemeClr val="accent1"/>
+          </a:lnRef>
+          <a:fillRef idx="3">
+            <a:schemeClr val="accent1"/>
+          </a:fillRef>
+          <a:effectRef idx="2">
+            <a:schemeClr val="accent1"/>
+          </a:effectRef>
+          <a:fontRef idx="minor">
+            <a:schemeClr val="lt1"/>
+          </a:fontRef>
+        </p:style>
+        <p:txBody>
+          <a:bodyPr rtlCol="0" anchor="ctr"/>
+          <a:lstStyle/>
+          <a:p>
+            <a:pPr algn="ctr"/>
+          </a:p>
+        </p:txBody>
+      </p:sp>
+      <p:sp>
+        <p:nvSpPr>
+          <p:cNvPr id="11" name="Rectangle 10"/>
+          <p:cNvSpPr/>
+          <p:nvPr/>
+        </p:nvSpPr>
+        <p:spPr>
+          <a:xfrm>
+            <a:off x="640080" y="2084832"/>
+            <a:ext cx="73152" cy="274320"/>
+          </a:xfrm>
+          <a:prstGeom prst="rect">
+            <a:avLst/>
+          </a:prstGeom>
+          <a:solidFill>
+            <a:srgbClr val="269CCB"/>
+          </a:solidFill>
+          <a:ln>
+            <a:noFill/>
+          </a:ln>
+        </p:spPr>
+        <p:style>
+          <a:lnRef idx="1">
+            <a:schemeClr val="accent1"/>
+          </a:lnRef>
+          <a:fillRef idx="3">
+            <a:schemeClr val="accent1"/>
+          </a:fillRef>
+          <a:effectRef idx="2">
+            <a:schemeClr val="accent1"/>
+          </a:effectRef>
+          <a:fontRef idx="minor">
+            <a:schemeClr val="lt1"/>
+          </a:fontRef>
+        </p:style>
+        <p:txBody>
+          <a:bodyPr rtlCol="0" anchor="ctr"/>
+          <a:lstStyle/>
+          <a:p>
+            <a:pPr algn="ctr"/>
+          </a:p>
+        </p:txBody>
+      </p:sp>
+      <p:sp>
+        <p:nvSpPr>
+          <p:cNvPr id="12" name="TextBox 11"/>
+          <p:cNvSpPr txBox="1"/>
+          <p:nvPr/>
+        </p:nvSpPr>
+        <p:spPr>
+          <a:xfrm>
+            <a:off x="1097280" y="2029968"/>
+            <a:ext cx="10362895" cy="402336"/>
+          </a:xfrm>
+          <a:prstGeom prst="rect">
+            <a:avLst/>
+          </a:prstGeom>
+          <a:noFill/>
+        </p:spPr>
+        <p:txBody>
+          <a:bodyPr wrap="square" anchor="ctr"/>
+          <a:lstStyle/>
+          <a:p>
+            <a:r>
+              <a:rPr sz="1500" b="0" i="0">
                 <a:solidFill>
                   <a:srgbClr val="333333"/>
                 </a:solidFill>
                 <a:latin typeface="Calibri"/>
               </a:rPr>
-              <a:t>Entregable:</a:t>
-            </a:r>
-            <a:r>
-              <a:rPr sz="1600" b="0" i="0">
+              <a:t>□ Errores esperados?</a:t>
+            </a:r>
+          </a:p>
+        </p:txBody>
+      </p:sp>
+      <p:sp>
+        <p:nvSpPr>
+          <p:cNvPr id="13" name="Rounded Rectangle 12"/>
+          <p:cNvSpPr/>
+          <p:nvPr/>
+        </p:nvSpPr>
+        <p:spPr>
+          <a:xfrm>
+            <a:off x="457200" y="2615184"/>
+            <a:ext cx="11277295" cy="566928"/>
+          </a:xfrm>
+          <a:prstGeom prst="roundRect">
+            <a:avLst>
+              <a:gd name="adj" fmla="val 12000"/>
+            </a:avLst>
+          </a:prstGeom>
+          <a:solidFill>
+            <a:srgbClr val="F2F2F2"/>
+          </a:solidFill>
+          <a:ln>
+            <a:noFill/>
+          </a:ln>
+        </p:spPr>
+        <p:style>
+          <a:lnRef idx="1">
+            <a:schemeClr val="accent1"/>
+          </a:lnRef>
+          <a:fillRef idx="3">
+            <a:schemeClr val="accent1"/>
+          </a:fillRef>
+          <a:effectRef idx="2">
+            <a:schemeClr val="accent1"/>
+          </a:effectRef>
+          <a:fontRef idx="minor">
+            <a:schemeClr val="lt1"/>
+          </a:fontRef>
+        </p:style>
+        <p:txBody>
+          <a:bodyPr rtlCol="0" anchor="ctr"/>
+          <a:lstStyle/>
+          <a:p>
+            <a:pPr algn="ctr"/>
+          </a:p>
+        </p:txBody>
+      </p:sp>
+      <p:sp>
+        <p:nvSpPr>
+          <p:cNvPr id="14" name="Rectangle 13"/>
+          <p:cNvSpPr/>
+          <p:nvPr/>
+        </p:nvSpPr>
+        <p:spPr>
+          <a:xfrm>
+            <a:off x="640080" y="2761488"/>
+            <a:ext cx="274320" cy="274320"/>
+          </a:xfrm>
+          <a:prstGeom prst="rect">
+            <a:avLst/>
+          </a:prstGeom>
+          <a:solidFill>
+            <a:srgbClr val="FFFFFF"/>
+          </a:solidFill>
+          <a:ln>
+            <a:solidFill>
+              <a:srgbClr val="333333"/>
+            </a:solidFill>
+          </a:ln>
+        </p:spPr>
+        <p:style>
+          <a:lnRef idx="1">
+            <a:schemeClr val="accent1"/>
+          </a:lnRef>
+          <a:fillRef idx="3">
+            <a:schemeClr val="accent1"/>
+          </a:fillRef>
+          <a:effectRef idx="2">
+            <a:schemeClr val="accent1"/>
+          </a:effectRef>
+          <a:fontRef idx="minor">
+            <a:schemeClr val="lt1"/>
+          </a:fontRef>
+        </p:style>
+        <p:txBody>
+          <a:bodyPr rtlCol="0" anchor="ctr"/>
+          <a:lstStyle/>
+          <a:p>
+            <a:pPr algn="ctr"/>
+          </a:p>
+        </p:txBody>
+      </p:sp>
+      <p:sp>
+        <p:nvSpPr>
+          <p:cNvPr id="15" name="Rectangle 14"/>
+          <p:cNvSpPr/>
+          <p:nvPr/>
+        </p:nvSpPr>
+        <p:spPr>
+          <a:xfrm>
+            <a:off x="640080" y="2761488"/>
+            <a:ext cx="73152" cy="274320"/>
+          </a:xfrm>
+          <a:prstGeom prst="rect">
+            <a:avLst/>
+          </a:prstGeom>
+          <a:solidFill>
+            <a:srgbClr val="269CCB"/>
+          </a:solidFill>
+          <a:ln>
+            <a:noFill/>
+          </a:ln>
+        </p:spPr>
+        <p:style>
+          <a:lnRef idx="1">
+            <a:schemeClr val="accent1"/>
+          </a:lnRef>
+          <a:fillRef idx="3">
+            <a:schemeClr val="accent1"/>
+          </a:fillRef>
+          <a:effectRef idx="2">
+            <a:schemeClr val="accent1"/>
+          </a:effectRef>
+          <a:fontRef idx="minor">
+            <a:schemeClr val="lt1"/>
+          </a:fontRef>
+        </p:style>
+        <p:txBody>
+          <a:bodyPr rtlCol="0" anchor="ctr"/>
+          <a:lstStyle/>
+          <a:p>
+            <a:pPr algn="ctr"/>
+          </a:p>
+        </p:txBody>
+      </p:sp>
+      <p:sp>
+        <p:nvSpPr>
+          <p:cNvPr id="16" name="TextBox 15"/>
+          <p:cNvSpPr txBox="1"/>
+          <p:nvPr/>
+        </p:nvSpPr>
+        <p:spPr>
+          <a:xfrm>
+            <a:off x="1097280" y="2706624"/>
+            <a:ext cx="10362895" cy="402336"/>
+          </a:xfrm>
+          <a:prstGeom prst="rect">
+            <a:avLst/>
+          </a:prstGeom>
+          <a:noFill/>
+        </p:spPr>
+        <p:txBody>
+          <a:bodyPr wrap="square" anchor="ctr"/>
+          <a:lstStyle/>
+          <a:p>
+            <a:r>
+              <a:rPr sz="1500" b="0" i="0">
                 <a:solidFill>
                   <a:srgbClr val="333333"/>
                 </a:solidFill>
                 <a:latin typeface="Calibri"/>
               </a:rPr>
-              <a:t> Contrato app&lt;-&gt;BD + outline de slides de sustentacion (5-8 min)</a:t>
-            </a:r>
-          </a:p>
-          <a:p>
-            <a:pPr>
-              <a:spcAft>
-                <a:spcPts val="800"/>
-              </a:spcAft>
-            </a:pPr>
-            <a:r>
-              <a:rPr sz="1600" b="0" i="0">
-                <a:solidFill>
-                  <a:srgbClr val="333333"/>
-                </a:solidFill>
-                <a:latin typeface="Calibri"/>
-              </a:rPr>
-              <a:t>–   Evidencia en playground (enlace) o archivo SQL/PNG propio.</a:t>
-            </a:r>
-          </a:p>
-          <a:p>
-            <a:pPr>
-              <a:spcAft>
-                <a:spcPts val="800"/>
-              </a:spcAft>
-            </a:pPr>
-            <a:r>
-              <a:rPr sz="1600" b="0" i="0">
-                <a:solidFill>
-                  <a:srgbClr val="333333"/>
-                </a:solidFill>
-                <a:latin typeface="Calibri"/>
-              </a:rPr>
-              <a:t>–   Actualizar checklist PI (que criterio de rubrica avanzo).</a:t>
-            </a:r>
-          </a:p>
-          <a:p>
-            <a:pPr>
-              <a:spcAft>
-                <a:spcPts val="800"/>
-              </a:spcAft>
-            </a:pPr>
-            <a:r>
-              <a:rPr sz="1600" b="0" i="0">
-                <a:solidFill>
-                  <a:srgbClr val="333333"/>
-                </a:solidFill>
-                <a:latin typeface="Calibri"/>
-              </a:rPr>
-              <a:t>–   </a:t>
-            </a:r>
-            <a:r>
-              <a:rPr sz="1600" b="1" i="0">
-                <a:solidFill>
-                  <a:srgbClr val="333333"/>
-                </a:solidFill>
-                <a:latin typeface="Calibri"/>
-              </a:rPr>
-              <a:t>Entrega en ExamLab</a:t>
-            </a:r>
-            <a:r>
-              <a:rPr sz="1600" b="0" i="0">
-                <a:solidFill>
-                  <a:srgbClr val="333333"/>
-                </a:solidFill>
-                <a:latin typeface="Calibri"/>
-              </a:rPr>
-              <a:t> (https://uniaj.examlab.workers.dev/) — domingo 23:59 cuando aplique taller.</a:t>
-            </a:r>
-          </a:p>
-        </p:txBody>
-      </p:sp>
-      <p:sp>
-        <p:nvSpPr>
-          <p:cNvPr id="6" name="TextBox 5"/>
+              <a:t>□ Outline completo?</a:t>
+            </a:r>
+          </a:p>
+        </p:txBody>
+      </p:sp>
+      <p:sp>
+        <p:nvSpPr>
+          <p:cNvPr id="17" name="TextBox 16"/>
           <p:cNvSpPr txBox="1"/>
           <p:nvPr/>
         </p:nvSpPr>
@@ -5621,109 +5692,21 @@
                 </a:solidFill>
                 <a:latin typeface="Calibri"/>
               </a:rPr>
-              <a:t>Para el PI esta semana</a:t>
-            </a:r>
-          </a:p>
-        </p:txBody>
-      </p:sp>
-      <p:sp>
-        <p:nvSpPr>
-          <p:cNvPr id="5" name="Rounded Rectangle 4"/>
-          <p:cNvSpPr/>
-          <p:nvPr/>
-        </p:nvSpPr>
-        <p:spPr>
-          <a:xfrm>
-            <a:off x="457200" y="1261872"/>
-            <a:ext cx="11277295" cy="1051560"/>
-          </a:xfrm>
-          <a:prstGeom prst="roundRect">
-            <a:avLst>
-              <a:gd name="adj" fmla="val 12000"/>
-            </a:avLst>
-          </a:prstGeom>
-          <a:solidFill>
-            <a:srgbClr val="E8F4FA"/>
-          </a:solidFill>
-          <a:ln>
-            <a:noFill/>
-          </a:ln>
-        </p:spPr>
-        <p:style>
-          <a:lnRef idx="1">
-            <a:schemeClr val="accent1"/>
-          </a:lnRef>
-          <a:fillRef idx="3">
-            <a:schemeClr val="accent1"/>
-          </a:fillRef>
-          <a:effectRef idx="2">
-            <a:schemeClr val="accent1"/>
-          </a:effectRef>
-          <a:fontRef idx="minor">
-            <a:schemeClr val="lt1"/>
-          </a:fontRef>
-        </p:style>
-        <p:txBody>
-          <a:bodyPr rtlCol="0" anchor="ctr"/>
-          <a:lstStyle/>
-          <a:p>
-            <a:pPr algn="ctr"/>
-          </a:p>
-        </p:txBody>
-      </p:sp>
-      <p:sp>
-        <p:nvSpPr>
-          <p:cNvPr id="6" name="Rectangle 5"/>
-          <p:cNvSpPr/>
-          <p:nvPr/>
-        </p:nvSpPr>
-        <p:spPr>
-          <a:xfrm>
-            <a:off x="457200" y="1261872"/>
-            <a:ext cx="128016" cy="1051560"/>
-          </a:xfrm>
-          <a:prstGeom prst="rect">
-            <a:avLst/>
-          </a:prstGeom>
-          <a:solidFill>
-            <a:srgbClr val="269CCB"/>
-          </a:solidFill>
-          <a:ln>
-            <a:noFill/>
-          </a:ln>
-        </p:spPr>
-        <p:style>
-          <a:lnRef idx="1">
-            <a:schemeClr val="accent1"/>
-          </a:lnRef>
-          <a:fillRef idx="3">
-            <a:schemeClr val="accent1"/>
-          </a:fillRef>
-          <a:effectRef idx="2">
-            <a:schemeClr val="accent1"/>
-          </a:effectRef>
-          <a:fontRef idx="minor">
-            <a:schemeClr val="lt1"/>
-          </a:fontRef>
-        </p:style>
-        <p:txBody>
-          <a:bodyPr rtlCol="0" anchor="ctr"/>
-          <a:lstStyle/>
-          <a:p>
-            <a:pPr algn="ctr"/>
-          </a:p>
-        </p:txBody>
-      </p:sp>
-      <p:sp>
-        <p:nvSpPr>
-          <p:cNvPr id="7" name="TextBox 6"/>
+              <a:t>Criterios de exito / entregable</a:t>
+            </a:r>
+          </a:p>
+        </p:txBody>
+      </p:sp>
+      <p:sp>
+        <p:nvSpPr>
+          <p:cNvPr id="5" name="TextBox 4"/>
           <p:cNvSpPr txBox="1"/>
           <p:nvPr/>
         </p:nvSpPr>
         <p:spPr>
           <a:xfrm>
-            <a:off x="777240" y="1399031"/>
-            <a:ext cx="10774375" cy="822959"/>
+            <a:off x="457200" y="1170432"/>
+            <a:ext cx="11277295" cy="5230368"/>
           </a:xfrm>
           <a:prstGeom prst="rect">
             <a:avLst/>
@@ -5736,313 +5719,110 @@
           </a:bodyPr>
           <a:lstStyle/>
           <a:p>
-            <a:r>
-              <a:rPr sz="1200" b="1" i="0">
-                <a:solidFill>
-                  <a:srgbClr val="269CCB"/>
-                </a:solidFill>
-                <a:latin typeface="Calibri"/>
-              </a:rPr>
-              <a:t>Info</a:t>
-            </a:r>
-          </a:p>
-          <a:p>
             <a:pPr>
-              <a:spcBef>
-                <a:spcPts val="400"/>
-              </a:spcBef>
+              <a:spcAft>
+                <a:spcPts val="800"/>
+              </a:spcAft>
             </a:pPr>
             <a:r>
-              <a:rPr sz="1400" b="0" i="0">
+              <a:rPr sz="1600" b="0" i="0">
                 <a:solidFill>
                   <a:srgbClr val="333333"/>
                 </a:solidFill>
                 <a:latin typeface="Calibri"/>
               </a:rPr>
-              <a:t>Hito: Contrato integracion + preparacion de entrega/sustentacion</a:t>
-            </a:r>
-          </a:p>
-        </p:txBody>
-      </p:sp>
-      <p:sp>
-        <p:nvSpPr>
-          <p:cNvPr id="8" name="Rounded Rectangle 7"/>
-          <p:cNvSpPr/>
-          <p:nvPr/>
-        </p:nvSpPr>
-        <p:spPr>
-          <a:xfrm>
-            <a:off x="457200" y="2478024"/>
-            <a:ext cx="11277295" cy="1051560"/>
-          </a:xfrm>
-          <a:prstGeom prst="roundRect">
-            <a:avLst>
-              <a:gd name="adj" fmla="val 12000"/>
-            </a:avLst>
-          </a:prstGeom>
-          <a:solidFill>
-            <a:srgbClr val="FFF8E1"/>
-          </a:solidFill>
-          <a:ln>
-            <a:noFill/>
-          </a:ln>
-        </p:spPr>
-        <p:style>
-          <a:lnRef idx="1">
-            <a:schemeClr val="accent1"/>
-          </a:lnRef>
-          <a:fillRef idx="3">
-            <a:schemeClr val="accent1"/>
-          </a:fillRef>
-          <a:effectRef idx="2">
-            <a:schemeClr val="accent1"/>
-          </a:effectRef>
-          <a:fontRef idx="minor">
-            <a:schemeClr val="lt1"/>
-          </a:fontRef>
-        </p:style>
-        <p:txBody>
-          <a:bodyPr rtlCol="0" anchor="ctr"/>
-          <a:lstStyle/>
-          <a:p>
-            <a:pPr algn="ctr"/>
-          </a:p>
-        </p:txBody>
-      </p:sp>
-      <p:sp>
-        <p:nvSpPr>
-          <p:cNvPr id="9" name="Rectangle 8"/>
-          <p:cNvSpPr/>
-          <p:nvPr/>
-        </p:nvSpPr>
-        <p:spPr>
-          <a:xfrm>
-            <a:off x="457200" y="2478024"/>
-            <a:ext cx="128016" cy="1051560"/>
-          </a:xfrm>
-          <a:prstGeom prst="rect">
-            <a:avLst/>
-          </a:prstGeom>
-          <a:solidFill>
-            <a:srgbClr val="FFD000"/>
-          </a:solidFill>
-          <a:ln>
-            <a:noFill/>
-          </a:ln>
-        </p:spPr>
-        <p:style>
-          <a:lnRef idx="1">
-            <a:schemeClr val="accent1"/>
-          </a:lnRef>
-          <a:fillRef idx="3">
-            <a:schemeClr val="accent1"/>
-          </a:fillRef>
-          <a:effectRef idx="2">
-            <a:schemeClr val="accent1"/>
-          </a:effectRef>
-          <a:fontRef idx="minor">
-            <a:schemeClr val="lt1"/>
-          </a:fontRef>
-        </p:style>
-        <p:txBody>
-          <a:bodyPr rtlCol="0" anchor="ctr"/>
-          <a:lstStyle/>
-          <a:p>
-            <a:pPr algn="ctr"/>
-          </a:p>
-        </p:txBody>
-      </p:sp>
-      <p:sp>
-        <p:nvSpPr>
-          <p:cNvPr id="10" name="TextBox 9"/>
-          <p:cNvSpPr txBox="1"/>
-          <p:nvPr/>
-        </p:nvSpPr>
-        <p:spPr>
-          <a:xfrm>
-            <a:off x="777240" y="2615184"/>
-            <a:ext cx="10774375" cy="822959"/>
-          </a:xfrm>
-          <a:prstGeom prst="rect">
-            <a:avLst/>
-          </a:prstGeom>
-          <a:noFill/>
-        </p:spPr>
-        <p:txBody>
-          <a:bodyPr wrap="square">
-            <a:spAutoFit/>
-          </a:bodyPr>
-          <a:lstStyle/>
-          <a:p>
-            <a:r>
-              <a:rPr sz="1200" b="1" i="0">
-                <a:solidFill>
-                  <a:srgbClr val="FFD000"/>
-                </a:solidFill>
-                <a:latin typeface="Calibri"/>
-              </a:rPr>
-              <a:t>Aclaración</a:t>
+              <a:t>–   </a:t>
+            </a:r>
+            <a:r>
+              <a:rPr sz="1600" b="1" i="0">
+                <a:solidFill>
+                  <a:srgbClr val="333333"/>
+                </a:solidFill>
+                <a:latin typeface="Calibri"/>
+              </a:rPr>
+              <a:t>Entregable:</a:t>
+            </a:r>
+            <a:r>
+              <a:rPr sz="1600" b="0" i="0">
+                <a:solidFill>
+                  <a:srgbClr val="333333"/>
+                </a:solidFill>
+                <a:latin typeface="Calibri"/>
+              </a:rPr>
+              <a:t> Contrato app&lt;-&gt;BD + outline de slides de sustentacion (5-8 min)</a:t>
             </a:r>
           </a:p>
           <a:p>
             <a:pPr>
-              <a:spcBef>
-                <a:spcPts val="400"/>
-              </a:spcBef>
+              <a:spcAft>
+                <a:spcPts val="800"/>
+              </a:spcAft>
             </a:pPr>
             <a:r>
-              <a:rPr sz="1400" b="0" i="0">
+              <a:rPr sz="1600" b="0" i="0">
                 <a:solidFill>
                   <a:srgbClr val="333333"/>
                 </a:solidFill>
                 <a:latin typeface="Calibri"/>
               </a:rPr>
-              <a:t>Enunciado completo: Clases/Proyecto Integrador/ (VetCare DB).</a:t>
-            </a:r>
-          </a:p>
-        </p:txBody>
-      </p:sp>
-      <p:sp>
-        <p:nvSpPr>
-          <p:cNvPr id="11" name="Rounded Rectangle 10"/>
-          <p:cNvSpPr/>
-          <p:nvPr/>
-        </p:nvSpPr>
-        <p:spPr>
-          <a:xfrm>
-            <a:off x="457200" y="3694176"/>
-            <a:ext cx="11277295" cy="1051560"/>
-          </a:xfrm>
-          <a:prstGeom prst="roundRect">
-            <a:avLst>
-              <a:gd name="adj" fmla="val 12000"/>
-            </a:avLst>
-          </a:prstGeom>
-          <a:solidFill>
-            <a:srgbClr val="FBE4E4"/>
-          </a:solidFill>
-          <a:ln>
-            <a:noFill/>
-          </a:ln>
-        </p:spPr>
-        <p:style>
-          <a:lnRef idx="1">
-            <a:schemeClr val="accent1"/>
-          </a:lnRef>
-          <a:fillRef idx="3">
-            <a:schemeClr val="accent1"/>
-          </a:fillRef>
-          <a:effectRef idx="2">
-            <a:schemeClr val="accent1"/>
-          </a:effectRef>
-          <a:fontRef idx="minor">
-            <a:schemeClr val="lt1"/>
-          </a:fontRef>
-        </p:style>
-        <p:txBody>
-          <a:bodyPr rtlCol="0" anchor="ctr"/>
-          <a:lstStyle/>
-          <a:p>
-            <a:pPr algn="ctr"/>
-          </a:p>
-        </p:txBody>
-      </p:sp>
-      <p:sp>
-        <p:nvSpPr>
-          <p:cNvPr id="12" name="Rectangle 11"/>
-          <p:cNvSpPr/>
-          <p:nvPr/>
-        </p:nvSpPr>
-        <p:spPr>
-          <a:xfrm>
-            <a:off x="457200" y="3694176"/>
-            <a:ext cx="128016" cy="1051560"/>
-          </a:xfrm>
-          <a:prstGeom prst="rect">
-            <a:avLst/>
-          </a:prstGeom>
-          <a:solidFill>
-            <a:srgbClr val="A02030"/>
-          </a:solidFill>
-          <a:ln>
-            <a:noFill/>
-          </a:ln>
-        </p:spPr>
-        <p:style>
-          <a:lnRef idx="1">
-            <a:schemeClr val="accent1"/>
-          </a:lnRef>
-          <a:fillRef idx="3">
-            <a:schemeClr val="accent1"/>
-          </a:fillRef>
-          <a:effectRef idx="2">
-            <a:schemeClr val="accent1"/>
-          </a:effectRef>
-          <a:fontRef idx="minor">
-            <a:schemeClr val="lt1"/>
-          </a:fontRef>
-        </p:style>
-        <p:txBody>
-          <a:bodyPr rtlCol="0" anchor="ctr"/>
-          <a:lstStyle/>
-          <a:p>
-            <a:pPr algn="ctr"/>
-          </a:p>
-        </p:txBody>
-      </p:sp>
-      <p:sp>
-        <p:nvSpPr>
-          <p:cNvPr id="13" name="TextBox 12"/>
-          <p:cNvSpPr txBox="1"/>
-          <p:nvPr/>
-        </p:nvSpPr>
-        <p:spPr>
-          <a:xfrm>
-            <a:off x="777240" y="3831336"/>
-            <a:ext cx="10774375" cy="822959"/>
-          </a:xfrm>
-          <a:prstGeom prst="rect">
-            <a:avLst/>
-          </a:prstGeom>
-          <a:noFill/>
-        </p:spPr>
-        <p:txBody>
-          <a:bodyPr wrap="square">
-            <a:spAutoFit/>
-          </a:bodyPr>
-          <a:lstStyle/>
-          <a:p>
-            <a:r>
-              <a:rPr sz="1200" b="1" i="0">
-                <a:solidFill>
-                  <a:srgbClr val="A02030"/>
-                </a:solidFill>
-                <a:latin typeface="Calibri"/>
-              </a:rPr>
-              <a:t>Atención</a:t>
+              <a:t>–   Evidencia en playground (enlace) o archivo SQL/PNG propio.</a:t>
             </a:r>
           </a:p>
           <a:p>
             <a:pPr>
-              <a:spcBef>
-                <a:spcPts val="400"/>
-              </a:spcBef>
+              <a:spcAft>
+                <a:spcPts val="800"/>
+              </a:spcAft>
             </a:pPr>
             <a:r>
-              <a:rPr sz="1400" b="0" i="0">
+              <a:rPr sz="1600" b="0" i="0">
                 <a:solidFill>
                   <a:srgbClr val="333333"/>
                 </a:solidFill>
                 <a:latin typeface="Calibri"/>
               </a:rPr>
-              <a:t>Taller de la semana en ExamLab (https://uniaj.examlab.workers.dev/): domingo 23:59 (regla del Acuerdo) cuando aplique.</a:t>
-            </a:r>
-          </a:p>
-        </p:txBody>
-      </p:sp>
-      <p:sp>
-        <p:nvSpPr>
-          <p:cNvPr id="14" name="TextBox 13"/>
+              <a:t>–   Actualizar checklist PI (que criterio de rubrica avanzo).</a:t>
+            </a:r>
+          </a:p>
+          <a:p>
+            <a:pPr>
+              <a:spcAft>
+                <a:spcPts val="800"/>
+              </a:spcAft>
+            </a:pPr>
+            <a:r>
+              <a:rPr sz="1600" b="0" i="0">
+                <a:solidFill>
+                  <a:srgbClr val="333333"/>
+                </a:solidFill>
+                <a:latin typeface="Calibri"/>
+              </a:rPr>
+              <a:t>–   </a:t>
+            </a:r>
+            <a:r>
+              <a:rPr sz="1600" b="1" i="0">
+                <a:solidFill>
+                  <a:srgbClr val="333333"/>
+                </a:solidFill>
+                <a:latin typeface="Calibri"/>
+              </a:rPr>
+              <a:t>Entrega en ExamLab</a:t>
+            </a:r>
+            <a:r>
+              <a:rPr sz="1600" b="0" i="0">
+                <a:solidFill>
+                  <a:srgbClr val="333333"/>
+                </a:solidFill>
+                <a:latin typeface="Calibri"/>
+              </a:rPr>
+              <a:t> (https://uniaj.examlab.workers.dev/) — domingo 23:59 cuando aplique taller.</a:t>
+            </a:r>
+          </a:p>
+        </p:txBody>
+      </p:sp>
+      <p:sp>
+        <p:nvSpPr>
+          <p:cNvPr id="6" name="TextBox 5"/>
           <p:cNvSpPr txBox="1"/>
           <p:nvPr/>
         </p:nvSpPr>
@@ -6110,6 +5890,601 @@
         <p:spPr>
           <a:xfrm>
             <a:off x="0" y="0"/>
+            <a:ext cx="12191695" cy="960120"/>
+          </a:xfrm>
+          <a:prstGeom prst="rect">
+            <a:avLst/>
+          </a:prstGeom>
+          <a:solidFill>
+            <a:srgbClr val="095292"/>
+          </a:solidFill>
+          <a:ln>
+            <a:noFill/>
+          </a:ln>
+        </p:spPr>
+        <p:style>
+          <a:lnRef idx="1">
+            <a:schemeClr val="accent1"/>
+          </a:lnRef>
+          <a:fillRef idx="3">
+            <a:schemeClr val="accent1"/>
+          </a:fillRef>
+          <a:effectRef idx="2">
+            <a:schemeClr val="accent1"/>
+          </a:effectRef>
+          <a:fontRef idx="minor">
+            <a:schemeClr val="lt1"/>
+          </a:fontRef>
+        </p:style>
+        <p:txBody>
+          <a:bodyPr rtlCol="0" anchor="ctr"/>
+          <a:lstStyle/>
+          <a:p>
+            <a:pPr algn="ctr"/>
+          </a:p>
+        </p:txBody>
+      </p:sp>
+      <p:sp>
+        <p:nvSpPr>
+          <p:cNvPr id="3" name="Rectangle 2"/>
+          <p:cNvSpPr/>
+          <p:nvPr/>
+        </p:nvSpPr>
+        <p:spPr>
+          <a:xfrm>
+            <a:off x="0" y="960120"/>
+            <a:ext cx="12191695" cy="41148"/>
+          </a:xfrm>
+          <a:prstGeom prst="rect">
+            <a:avLst/>
+          </a:prstGeom>
+          <a:solidFill>
+            <a:srgbClr val="FFD000"/>
+          </a:solidFill>
+          <a:ln>
+            <a:noFill/>
+          </a:ln>
+        </p:spPr>
+        <p:style>
+          <a:lnRef idx="1">
+            <a:schemeClr val="accent1"/>
+          </a:lnRef>
+          <a:fillRef idx="3">
+            <a:schemeClr val="accent1"/>
+          </a:fillRef>
+          <a:effectRef idx="2">
+            <a:schemeClr val="accent1"/>
+          </a:effectRef>
+          <a:fontRef idx="minor">
+            <a:schemeClr val="lt1"/>
+          </a:fontRef>
+        </p:style>
+        <p:txBody>
+          <a:bodyPr rtlCol="0" anchor="ctr"/>
+          <a:lstStyle/>
+          <a:p>
+            <a:pPr algn="ctr"/>
+          </a:p>
+        </p:txBody>
+      </p:sp>
+      <p:sp>
+        <p:nvSpPr>
+          <p:cNvPr id="4" name="TextBox 3"/>
+          <p:cNvSpPr txBox="1"/>
+          <p:nvPr/>
+        </p:nvSpPr>
+        <p:spPr>
+          <a:xfrm>
+            <a:off x="457200" y="164592"/>
+            <a:ext cx="11277295" cy="502920"/>
+          </a:xfrm>
+          <a:prstGeom prst="rect">
+            <a:avLst/>
+          </a:prstGeom>
+          <a:noFill/>
+        </p:spPr>
+        <p:txBody>
+          <a:bodyPr wrap="square">
+            <a:spAutoFit/>
+          </a:bodyPr>
+          <a:lstStyle/>
+          <a:p>
+            <a:r>
+              <a:rPr sz="2600" b="1" i="0">
+                <a:solidFill>
+                  <a:srgbClr val="FFFFFF"/>
+                </a:solidFill>
+                <a:latin typeface="Calibri"/>
+              </a:rPr>
+              <a:t>Para el PI esta semana</a:t>
+            </a:r>
+          </a:p>
+        </p:txBody>
+      </p:sp>
+      <p:sp>
+        <p:nvSpPr>
+          <p:cNvPr id="5" name="Rounded Rectangle 4"/>
+          <p:cNvSpPr/>
+          <p:nvPr/>
+        </p:nvSpPr>
+        <p:spPr>
+          <a:xfrm>
+            <a:off x="457200" y="1261872"/>
+            <a:ext cx="11277295" cy="1051560"/>
+          </a:xfrm>
+          <a:prstGeom prst="roundRect">
+            <a:avLst>
+              <a:gd name="adj" fmla="val 12000"/>
+            </a:avLst>
+          </a:prstGeom>
+          <a:solidFill>
+            <a:srgbClr val="E8F4FA"/>
+          </a:solidFill>
+          <a:ln>
+            <a:noFill/>
+          </a:ln>
+        </p:spPr>
+        <p:style>
+          <a:lnRef idx="1">
+            <a:schemeClr val="accent1"/>
+          </a:lnRef>
+          <a:fillRef idx="3">
+            <a:schemeClr val="accent1"/>
+          </a:fillRef>
+          <a:effectRef idx="2">
+            <a:schemeClr val="accent1"/>
+          </a:effectRef>
+          <a:fontRef idx="minor">
+            <a:schemeClr val="lt1"/>
+          </a:fontRef>
+        </p:style>
+        <p:txBody>
+          <a:bodyPr rtlCol="0" anchor="ctr"/>
+          <a:lstStyle/>
+          <a:p>
+            <a:pPr algn="ctr"/>
+          </a:p>
+        </p:txBody>
+      </p:sp>
+      <p:sp>
+        <p:nvSpPr>
+          <p:cNvPr id="6" name="Rectangle 5"/>
+          <p:cNvSpPr/>
+          <p:nvPr/>
+        </p:nvSpPr>
+        <p:spPr>
+          <a:xfrm>
+            <a:off x="457200" y="1261872"/>
+            <a:ext cx="128016" cy="1051560"/>
+          </a:xfrm>
+          <a:prstGeom prst="rect">
+            <a:avLst/>
+          </a:prstGeom>
+          <a:solidFill>
+            <a:srgbClr val="269CCB"/>
+          </a:solidFill>
+          <a:ln>
+            <a:noFill/>
+          </a:ln>
+        </p:spPr>
+        <p:style>
+          <a:lnRef idx="1">
+            <a:schemeClr val="accent1"/>
+          </a:lnRef>
+          <a:fillRef idx="3">
+            <a:schemeClr val="accent1"/>
+          </a:fillRef>
+          <a:effectRef idx="2">
+            <a:schemeClr val="accent1"/>
+          </a:effectRef>
+          <a:fontRef idx="minor">
+            <a:schemeClr val="lt1"/>
+          </a:fontRef>
+        </p:style>
+        <p:txBody>
+          <a:bodyPr rtlCol="0" anchor="ctr"/>
+          <a:lstStyle/>
+          <a:p>
+            <a:pPr algn="ctr"/>
+          </a:p>
+        </p:txBody>
+      </p:sp>
+      <p:sp>
+        <p:nvSpPr>
+          <p:cNvPr id="7" name="TextBox 6"/>
+          <p:cNvSpPr txBox="1"/>
+          <p:nvPr/>
+        </p:nvSpPr>
+        <p:spPr>
+          <a:xfrm>
+            <a:off x="777240" y="1399031"/>
+            <a:ext cx="10774375" cy="822959"/>
+          </a:xfrm>
+          <a:prstGeom prst="rect">
+            <a:avLst/>
+          </a:prstGeom>
+          <a:noFill/>
+        </p:spPr>
+        <p:txBody>
+          <a:bodyPr wrap="square">
+            <a:spAutoFit/>
+          </a:bodyPr>
+          <a:lstStyle/>
+          <a:p>
+            <a:r>
+              <a:rPr sz="1200" b="1" i="0">
+                <a:solidFill>
+                  <a:srgbClr val="269CCB"/>
+                </a:solidFill>
+                <a:latin typeface="Calibri"/>
+              </a:rPr>
+              <a:t>Info</a:t>
+            </a:r>
+          </a:p>
+          <a:p>
+            <a:pPr>
+              <a:spcBef>
+                <a:spcPts val="400"/>
+              </a:spcBef>
+            </a:pPr>
+            <a:r>
+              <a:rPr sz="1400" b="0" i="0">
+                <a:solidFill>
+                  <a:srgbClr val="333333"/>
+                </a:solidFill>
+                <a:latin typeface="Calibri"/>
+              </a:rPr>
+              <a:t>Hito: Contrato integracion + preparacion de entrega/sustentacion</a:t>
+            </a:r>
+          </a:p>
+        </p:txBody>
+      </p:sp>
+      <p:sp>
+        <p:nvSpPr>
+          <p:cNvPr id="8" name="Rounded Rectangle 7"/>
+          <p:cNvSpPr/>
+          <p:nvPr/>
+        </p:nvSpPr>
+        <p:spPr>
+          <a:xfrm>
+            <a:off x="457200" y="2478024"/>
+            <a:ext cx="11277295" cy="1051560"/>
+          </a:xfrm>
+          <a:prstGeom prst="roundRect">
+            <a:avLst>
+              <a:gd name="adj" fmla="val 12000"/>
+            </a:avLst>
+          </a:prstGeom>
+          <a:solidFill>
+            <a:srgbClr val="FFF8E1"/>
+          </a:solidFill>
+          <a:ln>
+            <a:noFill/>
+          </a:ln>
+        </p:spPr>
+        <p:style>
+          <a:lnRef idx="1">
+            <a:schemeClr val="accent1"/>
+          </a:lnRef>
+          <a:fillRef idx="3">
+            <a:schemeClr val="accent1"/>
+          </a:fillRef>
+          <a:effectRef idx="2">
+            <a:schemeClr val="accent1"/>
+          </a:effectRef>
+          <a:fontRef idx="minor">
+            <a:schemeClr val="lt1"/>
+          </a:fontRef>
+        </p:style>
+        <p:txBody>
+          <a:bodyPr rtlCol="0" anchor="ctr"/>
+          <a:lstStyle/>
+          <a:p>
+            <a:pPr algn="ctr"/>
+          </a:p>
+        </p:txBody>
+      </p:sp>
+      <p:sp>
+        <p:nvSpPr>
+          <p:cNvPr id="9" name="Rectangle 8"/>
+          <p:cNvSpPr/>
+          <p:nvPr/>
+        </p:nvSpPr>
+        <p:spPr>
+          <a:xfrm>
+            <a:off x="457200" y="2478024"/>
+            <a:ext cx="128016" cy="1051560"/>
+          </a:xfrm>
+          <a:prstGeom prst="rect">
+            <a:avLst/>
+          </a:prstGeom>
+          <a:solidFill>
+            <a:srgbClr val="FFD000"/>
+          </a:solidFill>
+          <a:ln>
+            <a:noFill/>
+          </a:ln>
+        </p:spPr>
+        <p:style>
+          <a:lnRef idx="1">
+            <a:schemeClr val="accent1"/>
+          </a:lnRef>
+          <a:fillRef idx="3">
+            <a:schemeClr val="accent1"/>
+          </a:fillRef>
+          <a:effectRef idx="2">
+            <a:schemeClr val="accent1"/>
+          </a:effectRef>
+          <a:fontRef idx="minor">
+            <a:schemeClr val="lt1"/>
+          </a:fontRef>
+        </p:style>
+        <p:txBody>
+          <a:bodyPr rtlCol="0" anchor="ctr"/>
+          <a:lstStyle/>
+          <a:p>
+            <a:pPr algn="ctr"/>
+          </a:p>
+        </p:txBody>
+      </p:sp>
+      <p:sp>
+        <p:nvSpPr>
+          <p:cNvPr id="10" name="TextBox 9"/>
+          <p:cNvSpPr txBox="1"/>
+          <p:nvPr/>
+        </p:nvSpPr>
+        <p:spPr>
+          <a:xfrm>
+            <a:off x="777240" y="2615184"/>
+            <a:ext cx="10774375" cy="822959"/>
+          </a:xfrm>
+          <a:prstGeom prst="rect">
+            <a:avLst/>
+          </a:prstGeom>
+          <a:noFill/>
+        </p:spPr>
+        <p:txBody>
+          <a:bodyPr wrap="square">
+            <a:spAutoFit/>
+          </a:bodyPr>
+          <a:lstStyle/>
+          <a:p>
+            <a:r>
+              <a:rPr sz="1200" b="1" i="0">
+                <a:solidFill>
+                  <a:srgbClr val="FFD000"/>
+                </a:solidFill>
+                <a:latin typeface="Calibri"/>
+              </a:rPr>
+              <a:t>Aclaración</a:t>
+            </a:r>
+          </a:p>
+          <a:p>
+            <a:pPr>
+              <a:spcBef>
+                <a:spcPts val="400"/>
+              </a:spcBef>
+            </a:pPr>
+            <a:r>
+              <a:rPr sz="1400" b="0" i="0">
+                <a:solidFill>
+                  <a:srgbClr val="333333"/>
+                </a:solidFill>
+                <a:latin typeface="Calibri"/>
+              </a:rPr>
+              <a:t>Enunciado completo: Clases/Proyecto Integrador/ (VetCare DB).</a:t>
+            </a:r>
+          </a:p>
+        </p:txBody>
+      </p:sp>
+      <p:sp>
+        <p:nvSpPr>
+          <p:cNvPr id="11" name="Rounded Rectangle 10"/>
+          <p:cNvSpPr/>
+          <p:nvPr/>
+        </p:nvSpPr>
+        <p:spPr>
+          <a:xfrm>
+            <a:off x="457200" y="3694176"/>
+            <a:ext cx="11277295" cy="1051560"/>
+          </a:xfrm>
+          <a:prstGeom prst="roundRect">
+            <a:avLst>
+              <a:gd name="adj" fmla="val 12000"/>
+            </a:avLst>
+          </a:prstGeom>
+          <a:solidFill>
+            <a:srgbClr val="FBE4E4"/>
+          </a:solidFill>
+          <a:ln>
+            <a:noFill/>
+          </a:ln>
+        </p:spPr>
+        <p:style>
+          <a:lnRef idx="1">
+            <a:schemeClr val="accent1"/>
+          </a:lnRef>
+          <a:fillRef idx="3">
+            <a:schemeClr val="accent1"/>
+          </a:fillRef>
+          <a:effectRef idx="2">
+            <a:schemeClr val="accent1"/>
+          </a:effectRef>
+          <a:fontRef idx="minor">
+            <a:schemeClr val="lt1"/>
+          </a:fontRef>
+        </p:style>
+        <p:txBody>
+          <a:bodyPr rtlCol="0" anchor="ctr"/>
+          <a:lstStyle/>
+          <a:p>
+            <a:pPr algn="ctr"/>
+          </a:p>
+        </p:txBody>
+      </p:sp>
+      <p:sp>
+        <p:nvSpPr>
+          <p:cNvPr id="12" name="Rectangle 11"/>
+          <p:cNvSpPr/>
+          <p:nvPr/>
+        </p:nvSpPr>
+        <p:spPr>
+          <a:xfrm>
+            <a:off x="457200" y="3694176"/>
+            <a:ext cx="128016" cy="1051560"/>
+          </a:xfrm>
+          <a:prstGeom prst="rect">
+            <a:avLst/>
+          </a:prstGeom>
+          <a:solidFill>
+            <a:srgbClr val="A02030"/>
+          </a:solidFill>
+          <a:ln>
+            <a:noFill/>
+          </a:ln>
+        </p:spPr>
+        <p:style>
+          <a:lnRef idx="1">
+            <a:schemeClr val="accent1"/>
+          </a:lnRef>
+          <a:fillRef idx="3">
+            <a:schemeClr val="accent1"/>
+          </a:fillRef>
+          <a:effectRef idx="2">
+            <a:schemeClr val="accent1"/>
+          </a:effectRef>
+          <a:fontRef idx="minor">
+            <a:schemeClr val="lt1"/>
+          </a:fontRef>
+        </p:style>
+        <p:txBody>
+          <a:bodyPr rtlCol="0" anchor="ctr"/>
+          <a:lstStyle/>
+          <a:p>
+            <a:pPr algn="ctr"/>
+          </a:p>
+        </p:txBody>
+      </p:sp>
+      <p:sp>
+        <p:nvSpPr>
+          <p:cNvPr id="13" name="TextBox 12"/>
+          <p:cNvSpPr txBox="1"/>
+          <p:nvPr/>
+        </p:nvSpPr>
+        <p:spPr>
+          <a:xfrm>
+            <a:off x="777240" y="3831336"/>
+            <a:ext cx="10774375" cy="822959"/>
+          </a:xfrm>
+          <a:prstGeom prst="rect">
+            <a:avLst/>
+          </a:prstGeom>
+          <a:noFill/>
+        </p:spPr>
+        <p:txBody>
+          <a:bodyPr wrap="square">
+            <a:spAutoFit/>
+          </a:bodyPr>
+          <a:lstStyle/>
+          <a:p>
+            <a:r>
+              <a:rPr sz="1200" b="1" i="0">
+                <a:solidFill>
+                  <a:srgbClr val="A02030"/>
+                </a:solidFill>
+                <a:latin typeface="Calibri"/>
+              </a:rPr>
+              <a:t>Atención</a:t>
+            </a:r>
+          </a:p>
+          <a:p>
+            <a:pPr>
+              <a:spcBef>
+                <a:spcPts val="400"/>
+              </a:spcBef>
+            </a:pPr>
+            <a:r>
+              <a:rPr sz="1400" b="0" i="0">
+                <a:solidFill>
+                  <a:srgbClr val="333333"/>
+                </a:solidFill>
+                <a:latin typeface="Calibri"/>
+              </a:rPr>
+              <a:t>Taller de la semana en ExamLab (https://uniaj.examlab.workers.dev/): domingo 23:59 (regla del Acuerdo) cuando aplique.</a:t>
+            </a:r>
+          </a:p>
+        </p:txBody>
+      </p:sp>
+      <p:sp>
+        <p:nvSpPr>
+          <p:cNvPr id="14" name="TextBox 13"/>
+          <p:cNvSpPr txBox="1"/>
+          <p:nvPr/>
+        </p:nvSpPr>
+        <p:spPr>
+          <a:xfrm>
+            <a:off x="11185855" y="6473952"/>
+            <a:ext cx="640080" cy="274320"/>
+          </a:xfrm>
+          <a:prstGeom prst="rect">
+            <a:avLst/>
+          </a:prstGeom>
+          <a:noFill/>
+        </p:spPr>
+        <p:txBody>
+          <a:bodyPr wrap="square">
+            <a:spAutoFit/>
+          </a:bodyPr>
+          <a:lstStyle/>
+          <a:p>
+            <a:pPr algn="r"/>
+            <a:r>
+              <a:rPr sz="1100" b="0" i="0">
+                <a:solidFill>
+                  <a:srgbClr val="666666"/>
+                </a:solidFill>
+                <a:latin typeface="Calibri"/>
+              </a:rPr>
+              <a:t>15</a:t>
+            </a:r>
+          </a:p>
+        </p:txBody>
+      </p:sp>
+    </p:spTree>
+  </p:cSld>
+  <p:clrMapOvr>
+    <a:masterClrMapping/>
+  </p:clrMapOvr>
+</p:sld>
+</file>
+
+<file path=ppt/slides/slide16.xml><?xml version="1.0" encoding="utf-8"?>
+<p:sld xmlns:a="http://schemas.openxmlformats.org/drawingml/2006/main" xmlns:p="http://schemas.openxmlformats.org/presentationml/2006/main" xmlns:r="http://schemas.openxmlformats.org/officeDocument/2006/relationships">
+  <p:cSld>
+    <p:bg>
+      <p:bgPr>
+        <a:solidFill>
+          <a:srgbClr val="FFFFFF"/>
+        </a:solidFill>
+        <a:effectLst/>
+      </p:bgPr>
+    </p:bg>
+    <p:spTree>
+      <p:nvGrpSpPr>
+        <p:cNvPr id="1" name=""/>
+        <p:cNvGrpSpPr/>
+        <p:nvPr/>
+      </p:nvGrpSpPr>
+      <p:grpSpPr/>
+      <p:sp>
+        <p:nvSpPr>
+          <p:cNvPr id="2" name="Rectangle 1"/>
+          <p:cNvSpPr/>
+          <p:nvPr/>
+        </p:nvSpPr>
+        <p:spPr>
+          <a:xfrm>
+            <a:off x="0" y="0"/>
             <a:ext cx="12191695" cy="164592"/>
           </a:xfrm>
           <a:prstGeom prst="rect">
@@ -8901,8 +9276,8 @@
         </p:blipFill>
         <p:spPr>
           <a:xfrm>
-            <a:off x="1743913" y="1792224"/>
-            <a:ext cx="1051560" cy="1051560"/>
+            <a:off x="1643329" y="1847087"/>
+            <a:ext cx="1252728" cy="1252728"/>
           </a:xfrm>
           <a:prstGeom prst="rect">
             <a:avLst/>
@@ -8917,8 +9292,8 @@
         </p:nvSpPr>
         <p:spPr>
           <a:xfrm>
-            <a:off x="530352" y="2916936"/>
-            <a:ext cx="3478682" cy="502920"/>
+            <a:off x="530352" y="3191256"/>
+            <a:ext cx="3478682" cy="621792"/>
           </a:xfrm>
           <a:prstGeom prst="rect">
             <a:avLst/>
@@ -9105,8 +9480,8 @@
         </p:blipFill>
         <p:spPr>
           <a:xfrm>
-            <a:off x="5570067" y="1792224"/>
-            <a:ext cx="1051560" cy="1051560"/>
+            <a:off x="5469483" y="1847087"/>
+            <a:ext cx="1252728" cy="1252728"/>
           </a:xfrm>
           <a:prstGeom prst="rect">
             <a:avLst/>
@@ -9121,8 +9496,8 @@
         </p:nvSpPr>
         <p:spPr>
           <a:xfrm>
-            <a:off x="4356506" y="2916936"/>
-            <a:ext cx="3478682" cy="502920"/>
+            <a:off x="4356506" y="3191256"/>
+            <a:ext cx="3478682" cy="621792"/>
           </a:xfrm>
           <a:prstGeom prst="rect">
             <a:avLst/>
@@ -9309,8 +9684,8 @@
         </p:blipFill>
         <p:spPr>
           <a:xfrm>
-            <a:off x="9396222" y="1792224"/>
-            <a:ext cx="1051560" cy="1051560"/>
+            <a:off x="9295638" y="1847087"/>
+            <a:ext cx="1252728" cy="1252728"/>
           </a:xfrm>
           <a:prstGeom prst="rect">
             <a:avLst/>
@@ -9325,8 +9700,8 @@
         </p:nvSpPr>
         <p:spPr>
           <a:xfrm>
-            <a:off x="8182660" y="2916936"/>
-            <a:ext cx="3478682" cy="502920"/>
+            <a:off x="8182660" y="3191256"/>
+            <a:ext cx="3478682" cy="621792"/>
           </a:xfrm>
           <a:prstGeom prst="rect">
             <a:avLst/>
@@ -9436,7 +9811,7 @@
         <p:spPr>
           <a:xfrm>
             <a:off x="0" y="0"/>
-            <a:ext cx="12191695" cy="960120"/>
+            <a:ext cx="12191695" cy="1170432"/>
           </a:xfrm>
           <a:prstGeom prst="rect">
             <a:avLst/>
@@ -9478,7 +9853,7 @@
         </p:nvSpPr>
         <p:spPr>
           <a:xfrm>
-            <a:off x="0" y="960120"/>
+            <a:off x="0" y="1170432"/>
             <a:ext cx="12191695" cy="41148"/>
           </a:xfrm>
           <a:prstGeom prst="rect">
@@ -9522,7 +9897,7 @@
         <p:spPr>
           <a:xfrm>
             <a:off x="457200" y="164592"/>
-            <a:ext cx="11277295" cy="502920"/>
+            <a:ext cx="11277295" cy="384048"/>
           </a:xfrm>
           <a:prstGeom prst="rect">
             <a:avLst/>
@@ -9542,7 +9917,7 @@
                 </a:solidFill>
                 <a:latin typeface="Calibri"/>
               </a:rPr>
-              <a:t>Taller PI VetCare — contexto / por que importa</a:t>
+              <a:t>Del boceto a ExamLab (diagrama)</a:t>
             </a:r>
           </a:p>
         </p:txBody>
@@ -9555,8 +9930,8 @@
         </p:nvSpPr>
         <p:spPr>
           <a:xfrm>
-            <a:off x="457200" y="1170432"/>
-            <a:ext cx="11277295" cy="5230368"/>
+            <a:off x="457200" y="566928"/>
+            <a:ext cx="11277295" cy="411480"/>
           </a:xfrm>
           <a:prstGeom prst="rect">
             <a:avLst/>
@@ -9569,60 +9944,705 @@
           </a:bodyPr>
           <a:lstStyle/>
           <a:p>
+            <a:r>
+              <a:rPr sz="1400" b="0" i="0">
+                <a:solidFill>
+                  <a:srgbClr val="B8D8EE"/>
+                </a:solidFill>
+                <a:latin typeface="Calibri"/>
+              </a:rPr>
+              <a:t>El diagrama se entrega como codigo Mermaid dentro de ExamLab, no como imagen</a:t>
+            </a:r>
+          </a:p>
+        </p:txBody>
+      </p:sp>
+      <p:sp>
+        <p:nvSpPr>
+          <p:cNvPr id="6" name="Rounded Rectangle 5"/>
+          <p:cNvSpPr/>
+          <p:nvPr/>
+        </p:nvSpPr>
+        <p:spPr>
+          <a:xfrm>
+            <a:off x="457200" y="1659636"/>
+            <a:ext cx="11277295" cy="1051560"/>
+          </a:xfrm>
+          <a:prstGeom prst="roundRect">
+            <a:avLst>
+              <a:gd name="adj" fmla="val 12000"/>
+            </a:avLst>
+          </a:prstGeom>
+          <a:solidFill>
+            <a:srgbClr val="F2F2F2"/>
+          </a:solidFill>
+          <a:ln>
+            <a:noFill/>
+          </a:ln>
+        </p:spPr>
+        <p:style>
+          <a:lnRef idx="1">
+            <a:schemeClr val="accent1"/>
+          </a:lnRef>
+          <a:fillRef idx="3">
+            <a:schemeClr val="accent1"/>
+          </a:fillRef>
+          <a:effectRef idx="2">
+            <a:schemeClr val="accent1"/>
+          </a:effectRef>
+          <a:fontRef idx="minor">
+            <a:schemeClr val="lt1"/>
+          </a:fontRef>
+        </p:style>
+        <p:txBody>
+          <a:bodyPr rtlCol="0" anchor="ctr"/>
+          <a:lstStyle/>
+          <a:p>
+            <a:pPr algn="ctr"/>
+          </a:p>
+        </p:txBody>
+      </p:sp>
+      <p:sp>
+        <p:nvSpPr>
+          <p:cNvPr id="7" name="Rounded Rectangle 6"/>
+          <p:cNvSpPr/>
+          <p:nvPr/>
+        </p:nvSpPr>
+        <p:spPr>
+          <a:xfrm>
+            <a:off x="594360" y="1965960"/>
+            <a:ext cx="438912" cy="438912"/>
+          </a:xfrm>
+          <a:prstGeom prst="roundRect">
+            <a:avLst>
+              <a:gd name="adj" fmla="val 12000"/>
+            </a:avLst>
+          </a:prstGeom>
+          <a:solidFill>
+            <a:srgbClr val="095292"/>
+          </a:solidFill>
+          <a:ln>
+            <a:noFill/>
+          </a:ln>
+        </p:spPr>
+        <p:style>
+          <a:lnRef idx="1">
+            <a:schemeClr val="accent1"/>
+          </a:lnRef>
+          <a:fillRef idx="3">
+            <a:schemeClr val="accent1"/>
+          </a:fillRef>
+          <a:effectRef idx="2">
+            <a:schemeClr val="accent1"/>
+          </a:effectRef>
+          <a:fontRef idx="minor">
+            <a:schemeClr val="lt1"/>
+          </a:fontRef>
+        </p:style>
+        <p:txBody>
+          <a:bodyPr rtlCol="0" anchor="ctr"/>
+          <a:lstStyle/>
+          <a:p>
+            <a:pPr algn="ctr"/>
+          </a:p>
+        </p:txBody>
+      </p:sp>
+      <p:sp>
+        <p:nvSpPr>
+          <p:cNvPr id="8" name="TextBox 7"/>
+          <p:cNvSpPr txBox="1"/>
+          <p:nvPr/>
+        </p:nvSpPr>
+        <p:spPr>
+          <a:xfrm>
+            <a:off x="594360" y="1965960"/>
+            <a:ext cx="438912" cy="438912"/>
+          </a:xfrm>
+          <a:prstGeom prst="rect">
+            <a:avLst/>
+          </a:prstGeom>
+          <a:noFill/>
+        </p:spPr>
+        <p:txBody>
+          <a:bodyPr wrap="square" anchor="ctr"/>
+          <a:lstStyle/>
+          <a:p>
+            <a:pPr algn="ctr"/>
+            <a:r>
+              <a:rPr sz="1600" b="1" i="0">
+                <a:solidFill>
+                  <a:srgbClr val="FFFFFF"/>
+                </a:solidFill>
+                <a:latin typeface="Calibri"/>
+              </a:rPr>
+              <a:t>1</a:t>
+            </a:r>
+          </a:p>
+        </p:txBody>
+      </p:sp>
+      <p:sp>
+        <p:nvSpPr>
+          <p:cNvPr id="9" name="TextBox 8"/>
+          <p:cNvSpPr txBox="1"/>
+          <p:nvPr/>
+        </p:nvSpPr>
+        <p:spPr>
+          <a:xfrm>
+            <a:off x="1188720" y="1751076"/>
+            <a:ext cx="10271455" cy="886968"/>
+          </a:xfrm>
+          <a:prstGeom prst="rect">
+            <a:avLst/>
+          </a:prstGeom>
+          <a:noFill/>
+        </p:spPr>
+        <p:txBody>
+          <a:bodyPr wrap="square" anchor="ctr"/>
+          <a:lstStyle/>
+          <a:p>
+            <a:r>
+              <a:rPr sz="1500" b="1" i="0">
+                <a:solidFill>
+                  <a:srgbClr val="095292"/>
+                </a:solidFill>
+                <a:latin typeface="Calibri"/>
+              </a:rPr>
+              <a:t>Disena visual</a:t>
+            </a:r>
+          </a:p>
+          <a:p>
             <a:pPr>
-              <a:spcAft>
-                <a:spcPts val="800"/>
-              </a:spcAft>
+              <a:spcBef>
+                <a:spcPts val="200"/>
+              </a:spcBef>
             </a:pPr>
             <a:r>
-              <a:rPr sz="1600" b="0" i="0">
+              <a:rPr sz="1300" b="0" i="0">
                 <a:solidFill>
                   <a:srgbClr val="333333"/>
                 </a:solidFill>
                 <a:latin typeface="Calibri"/>
               </a:rPr>
-              <a:t>–   </a:t>
-            </a:r>
+              <a:t>Dibuja el diagrama como quieras en Excalidraw o draw.io: es mas rapido arrastrar cajas que escribir codigo, y ahi es donde piensas el modelo.</a:t>
+            </a:r>
+          </a:p>
+        </p:txBody>
+      </p:sp>
+      <p:sp>
+        <p:nvSpPr>
+          <p:cNvPr id="10" name="Rounded Rectangle 9"/>
+          <p:cNvSpPr/>
+          <p:nvPr/>
+        </p:nvSpPr>
+        <p:spPr>
+          <a:xfrm>
+            <a:off x="457200" y="2802636"/>
+            <a:ext cx="11277295" cy="1051560"/>
+          </a:xfrm>
+          <a:prstGeom prst="roundRect">
+            <a:avLst>
+              <a:gd name="adj" fmla="val 12000"/>
+            </a:avLst>
+          </a:prstGeom>
+          <a:solidFill>
+            <a:srgbClr val="E8F4FA"/>
+          </a:solidFill>
+          <a:ln>
+            <a:noFill/>
+          </a:ln>
+        </p:spPr>
+        <p:style>
+          <a:lnRef idx="1">
+            <a:schemeClr val="accent1"/>
+          </a:lnRef>
+          <a:fillRef idx="3">
+            <a:schemeClr val="accent1"/>
+          </a:fillRef>
+          <a:effectRef idx="2">
+            <a:schemeClr val="accent1"/>
+          </a:effectRef>
+          <a:fontRef idx="minor">
+            <a:schemeClr val="lt1"/>
+          </a:fontRef>
+        </p:style>
+        <p:txBody>
+          <a:bodyPr rtlCol="0" anchor="ctr"/>
+          <a:lstStyle/>
+          <a:p>
+            <a:pPr algn="ctr"/>
+          </a:p>
+        </p:txBody>
+      </p:sp>
+      <p:sp>
+        <p:nvSpPr>
+          <p:cNvPr id="11" name="Rounded Rectangle 10"/>
+          <p:cNvSpPr/>
+          <p:nvPr/>
+        </p:nvSpPr>
+        <p:spPr>
+          <a:xfrm>
+            <a:off x="594360" y="3108960"/>
+            <a:ext cx="438912" cy="438912"/>
+          </a:xfrm>
+          <a:prstGeom prst="roundRect">
+            <a:avLst>
+              <a:gd name="adj" fmla="val 12000"/>
+            </a:avLst>
+          </a:prstGeom>
+          <a:solidFill>
+            <a:srgbClr val="095292"/>
+          </a:solidFill>
+          <a:ln>
+            <a:noFill/>
+          </a:ln>
+        </p:spPr>
+        <p:style>
+          <a:lnRef idx="1">
+            <a:schemeClr val="accent1"/>
+          </a:lnRef>
+          <a:fillRef idx="3">
+            <a:schemeClr val="accent1"/>
+          </a:fillRef>
+          <a:effectRef idx="2">
+            <a:schemeClr val="accent1"/>
+          </a:effectRef>
+          <a:fontRef idx="minor">
+            <a:schemeClr val="lt1"/>
+          </a:fontRef>
+        </p:style>
+        <p:txBody>
+          <a:bodyPr rtlCol="0" anchor="ctr"/>
+          <a:lstStyle/>
+          <a:p>
+            <a:pPr algn="ctr"/>
+          </a:p>
+        </p:txBody>
+      </p:sp>
+      <p:sp>
+        <p:nvSpPr>
+          <p:cNvPr id="12" name="TextBox 11"/>
+          <p:cNvSpPr txBox="1"/>
+          <p:nvPr/>
+        </p:nvSpPr>
+        <p:spPr>
+          <a:xfrm>
+            <a:off x="594360" y="3108960"/>
+            <a:ext cx="438912" cy="438912"/>
+          </a:xfrm>
+          <a:prstGeom prst="rect">
+            <a:avLst/>
+          </a:prstGeom>
+          <a:noFill/>
+        </p:spPr>
+        <p:txBody>
+          <a:bodyPr wrap="square" anchor="ctr"/>
+          <a:lstStyle/>
+          <a:p>
+            <a:pPr algn="ctr"/>
             <a:r>
               <a:rPr sz="1600" b="1" i="0">
                 <a:solidFill>
+                  <a:srgbClr val="FFFFFF"/>
+                </a:solidFill>
+                <a:latin typeface="Calibri"/>
+              </a:rPr>
+              <a:t>2</a:t>
+            </a:r>
+          </a:p>
+        </p:txBody>
+      </p:sp>
+      <p:sp>
+        <p:nvSpPr>
+          <p:cNvPr id="13" name="TextBox 12"/>
+          <p:cNvSpPr txBox="1"/>
+          <p:nvPr/>
+        </p:nvSpPr>
+        <p:spPr>
+          <a:xfrm>
+            <a:off x="1188720" y="2894076"/>
+            <a:ext cx="10271455" cy="886968"/>
+          </a:xfrm>
+          <a:prstGeom prst="rect">
+            <a:avLst/>
+          </a:prstGeom>
+          <a:noFill/>
+        </p:spPr>
+        <p:txBody>
+          <a:bodyPr wrap="square" anchor="ctr"/>
+          <a:lstStyle/>
+          <a:p>
+            <a:r>
+              <a:rPr sz="1500" b="1" i="0">
+                <a:solidFill>
+                  <a:srgbClr val="095292"/>
+                </a:solidFill>
+                <a:latin typeface="Calibri"/>
+              </a:rPr>
+              <a:t>Traduce con IA</a:t>
+            </a:r>
+          </a:p>
+          <a:p>
+            <a:pPr>
+              <a:spcBef>
+                <a:spcPts val="200"/>
+              </a:spcBef>
+            </a:pPr>
+            <a:r>
+              <a:rPr sz="1300" b="0" i="0">
+                <a:solidFill>
                   <a:srgbClr val="333333"/>
                 </a:solidFill>
                 <a:latin typeface="Calibri"/>
               </a:rPr>
-              <a:t>Por qué importa al PI:</a:t>
-            </a:r>
-            <a:r>
-              <a:rPr sz="1600" b="0" i="0">
+              <a:t>Copia o describe tu boceto a una IA y pidele el codigo Mermaid: «convierte este diagrama a Mermaid usando sequenceDiagram». Revisa el resultado: la IA acierta la sintaxis, no tu modelo.</a:t>
+            </a:r>
+          </a:p>
+        </p:txBody>
+      </p:sp>
+      <p:sp>
+        <p:nvSpPr>
+          <p:cNvPr id="14" name="Rounded Rectangle 13"/>
+          <p:cNvSpPr/>
+          <p:nvPr/>
+        </p:nvSpPr>
+        <p:spPr>
+          <a:xfrm>
+            <a:off x="457200" y="3945636"/>
+            <a:ext cx="11277295" cy="1051560"/>
+          </a:xfrm>
+          <a:prstGeom prst="roundRect">
+            <a:avLst>
+              <a:gd name="adj" fmla="val 12000"/>
+            </a:avLst>
+          </a:prstGeom>
+          <a:solidFill>
+            <a:srgbClr val="F2F2F2"/>
+          </a:solidFill>
+          <a:ln>
+            <a:noFill/>
+          </a:ln>
+        </p:spPr>
+        <p:style>
+          <a:lnRef idx="1">
+            <a:schemeClr val="accent1"/>
+          </a:lnRef>
+          <a:fillRef idx="3">
+            <a:schemeClr val="accent1"/>
+          </a:fillRef>
+          <a:effectRef idx="2">
+            <a:schemeClr val="accent1"/>
+          </a:effectRef>
+          <a:fontRef idx="minor">
+            <a:schemeClr val="lt1"/>
+          </a:fontRef>
+        </p:style>
+        <p:txBody>
+          <a:bodyPr rtlCol="0" anchor="ctr"/>
+          <a:lstStyle/>
+          <a:p>
+            <a:pPr algn="ctr"/>
+          </a:p>
+        </p:txBody>
+      </p:sp>
+      <p:sp>
+        <p:nvSpPr>
+          <p:cNvPr id="15" name="Rounded Rectangle 14"/>
+          <p:cNvSpPr/>
+          <p:nvPr/>
+        </p:nvSpPr>
+        <p:spPr>
+          <a:xfrm>
+            <a:off x="594360" y="4251960"/>
+            <a:ext cx="438912" cy="438912"/>
+          </a:xfrm>
+          <a:prstGeom prst="roundRect">
+            <a:avLst>
+              <a:gd name="adj" fmla="val 12000"/>
+            </a:avLst>
+          </a:prstGeom>
+          <a:solidFill>
+            <a:srgbClr val="095292"/>
+          </a:solidFill>
+          <a:ln>
+            <a:noFill/>
+          </a:ln>
+        </p:spPr>
+        <p:style>
+          <a:lnRef idx="1">
+            <a:schemeClr val="accent1"/>
+          </a:lnRef>
+          <a:fillRef idx="3">
+            <a:schemeClr val="accent1"/>
+          </a:fillRef>
+          <a:effectRef idx="2">
+            <a:schemeClr val="accent1"/>
+          </a:effectRef>
+          <a:fontRef idx="minor">
+            <a:schemeClr val="lt1"/>
+          </a:fontRef>
+        </p:style>
+        <p:txBody>
+          <a:bodyPr rtlCol="0" anchor="ctr"/>
+          <a:lstStyle/>
+          <a:p>
+            <a:pPr algn="ctr"/>
+          </a:p>
+        </p:txBody>
+      </p:sp>
+      <p:sp>
+        <p:nvSpPr>
+          <p:cNvPr id="16" name="TextBox 15"/>
+          <p:cNvSpPr txBox="1"/>
+          <p:nvPr/>
+        </p:nvSpPr>
+        <p:spPr>
+          <a:xfrm>
+            <a:off x="594360" y="4251960"/>
+            <a:ext cx="438912" cy="438912"/>
+          </a:xfrm>
+          <a:prstGeom prst="rect">
+            <a:avLst/>
+          </a:prstGeom>
+          <a:noFill/>
+        </p:spPr>
+        <p:txBody>
+          <a:bodyPr wrap="square" anchor="ctr"/>
+          <a:lstStyle/>
+          <a:p>
+            <a:pPr algn="ctr"/>
+            <a:r>
+              <a:rPr sz="1600" b="1" i="0">
+                <a:solidFill>
+                  <a:srgbClr val="FFFFFF"/>
+                </a:solidFill>
+                <a:latin typeface="Calibri"/>
+              </a:rPr>
+              <a:t>3</a:t>
+            </a:r>
+          </a:p>
+        </p:txBody>
+      </p:sp>
+      <p:sp>
+        <p:nvSpPr>
+          <p:cNvPr id="17" name="TextBox 16"/>
+          <p:cNvSpPr txBox="1"/>
+          <p:nvPr/>
+        </p:nvSpPr>
+        <p:spPr>
+          <a:xfrm>
+            <a:off x="1188720" y="4037076"/>
+            <a:ext cx="10271455" cy="886968"/>
+          </a:xfrm>
+          <a:prstGeom prst="rect">
+            <a:avLst/>
+          </a:prstGeom>
+          <a:noFill/>
+        </p:spPr>
+        <p:txBody>
+          <a:bodyPr wrap="square" anchor="ctr"/>
+          <a:lstStyle/>
+          <a:p>
+            <a:r>
+              <a:rPr sz="1500" b="1" i="0">
+                <a:solidFill>
+                  <a:srgbClr val="095292"/>
+                </a:solidFill>
+                <a:latin typeface="Calibri"/>
+              </a:rPr>
+              <a:t>Pega y renderiza en ExamLab</a:t>
+            </a:r>
+          </a:p>
+          <a:p>
+            <a:pPr>
+              <a:spcBef>
+                <a:spcPts val="200"/>
+              </a:spcBef>
+            </a:pPr>
+            <a:r>
+              <a:rPr sz="1300" b="0" i="0">
                 <a:solidFill>
                   <a:srgbClr val="333333"/>
                 </a:solidFill>
                 <a:latin typeface="Calibri"/>
               </a:rPr>
-              <a:t> app llama contrato, no SQL suelto.</a:t>
+              <a:t>Pega ese codigo en la caja de texto de la pregunta y mira como lo dibuja la plataforma. Si no renderiza, corrige ahi mismo: lo que se califica es el diagrama renderizado dentro de ExamLab.</a:t>
+            </a:r>
+          </a:p>
+        </p:txBody>
+      </p:sp>
+      <p:sp>
+        <p:nvSpPr>
+          <p:cNvPr id="18" name="Rounded Rectangle 17"/>
+          <p:cNvSpPr/>
+          <p:nvPr/>
+        </p:nvSpPr>
+        <p:spPr>
+          <a:xfrm>
+            <a:off x="457200" y="5088636"/>
+            <a:ext cx="11277295" cy="1051560"/>
+          </a:xfrm>
+          <a:prstGeom prst="roundRect">
+            <a:avLst>
+              <a:gd name="adj" fmla="val 12000"/>
+            </a:avLst>
+          </a:prstGeom>
+          <a:solidFill>
+            <a:srgbClr val="E8F4FA"/>
+          </a:solidFill>
+          <a:ln>
+            <a:noFill/>
+          </a:ln>
+        </p:spPr>
+        <p:style>
+          <a:lnRef idx="1">
+            <a:schemeClr val="accent1"/>
+          </a:lnRef>
+          <a:fillRef idx="3">
+            <a:schemeClr val="accent1"/>
+          </a:fillRef>
+          <a:effectRef idx="2">
+            <a:schemeClr val="accent1"/>
+          </a:effectRef>
+          <a:fontRef idx="minor">
+            <a:schemeClr val="lt1"/>
+          </a:fontRef>
+        </p:style>
+        <p:txBody>
+          <a:bodyPr rtlCol="0" anchor="ctr"/>
+          <a:lstStyle/>
+          <a:p>
+            <a:pPr algn="ctr"/>
+          </a:p>
+        </p:txBody>
+      </p:sp>
+      <p:sp>
+        <p:nvSpPr>
+          <p:cNvPr id="19" name="Rounded Rectangle 18"/>
+          <p:cNvSpPr/>
+          <p:nvPr/>
+        </p:nvSpPr>
+        <p:spPr>
+          <a:xfrm>
+            <a:off x="594360" y="5394960"/>
+            <a:ext cx="438912" cy="438912"/>
+          </a:xfrm>
+          <a:prstGeom prst="roundRect">
+            <a:avLst>
+              <a:gd name="adj" fmla="val 12000"/>
+            </a:avLst>
+          </a:prstGeom>
+          <a:solidFill>
+            <a:srgbClr val="095292"/>
+          </a:solidFill>
+          <a:ln>
+            <a:noFill/>
+          </a:ln>
+        </p:spPr>
+        <p:style>
+          <a:lnRef idx="1">
+            <a:schemeClr val="accent1"/>
+          </a:lnRef>
+          <a:fillRef idx="3">
+            <a:schemeClr val="accent1"/>
+          </a:fillRef>
+          <a:effectRef idx="2">
+            <a:schemeClr val="accent1"/>
+          </a:effectRef>
+          <a:fontRef idx="minor">
+            <a:schemeClr val="lt1"/>
+          </a:fontRef>
+        </p:style>
+        <p:txBody>
+          <a:bodyPr rtlCol="0" anchor="ctr"/>
+          <a:lstStyle/>
+          <a:p>
+            <a:pPr algn="ctr"/>
+          </a:p>
+        </p:txBody>
+      </p:sp>
+      <p:sp>
+        <p:nvSpPr>
+          <p:cNvPr id="20" name="TextBox 19"/>
+          <p:cNvSpPr txBox="1"/>
+          <p:nvPr/>
+        </p:nvSpPr>
+        <p:spPr>
+          <a:xfrm>
+            <a:off x="594360" y="5394960"/>
+            <a:ext cx="438912" cy="438912"/>
+          </a:xfrm>
+          <a:prstGeom prst="rect">
+            <a:avLst/>
+          </a:prstGeom>
+          <a:noFill/>
+        </p:spPr>
+        <p:txBody>
+          <a:bodyPr wrap="square" anchor="ctr"/>
+          <a:lstStyle/>
+          <a:p>
+            <a:pPr algn="ctr"/>
+            <a:r>
+              <a:rPr sz="1600" b="1" i="0">
+                <a:solidFill>
+                  <a:srgbClr val="FFFFFF"/>
+                </a:solidFill>
+                <a:latin typeface="Calibri"/>
+              </a:rPr>
+              <a:t>4</a:t>
+            </a:r>
+          </a:p>
+        </p:txBody>
+      </p:sp>
+      <p:sp>
+        <p:nvSpPr>
+          <p:cNvPr id="21" name="TextBox 20"/>
+          <p:cNvSpPr txBox="1"/>
+          <p:nvPr/>
+        </p:nvSpPr>
+        <p:spPr>
+          <a:xfrm>
+            <a:off x="1188720" y="5180076"/>
+            <a:ext cx="10271455" cy="886968"/>
+          </a:xfrm>
+          <a:prstGeom prst="rect">
+            <a:avLst/>
+          </a:prstGeom>
+          <a:noFill/>
+        </p:spPr>
+        <p:txBody>
+          <a:bodyPr wrap="square" anchor="ctr"/>
+          <a:lstStyle/>
+          <a:p>
+            <a:r>
+              <a:rPr sz="1500" b="1" i="0">
+                <a:solidFill>
+                  <a:srgbClr val="095292"/>
+                </a:solidFill>
+                <a:latin typeface="Calibri"/>
+              </a:rPr>
+              <a:t>Guarda el PNG para tu PI</a:t>
             </a:r>
           </a:p>
           <a:p>
             <a:pPr>
-              <a:spcAft>
-                <a:spcPts val="800"/>
-              </a:spcAft>
+              <a:spcBef>
+                <a:spcPts val="200"/>
+              </a:spcBef>
             </a:pPr>
             <a:r>
-              <a:rPr sz="1600" b="0" i="0">
+              <a:rPr sz="1300" b="0" i="0">
                 <a:solidFill>
                   <a:srgbClr val="333333"/>
                 </a:solidFill>
                 <a:latin typeface="Calibri"/>
               </a:rPr>
-              <a:t>–   Preparar sustentacion.</a:t>
-            </a:r>
-          </a:p>
-        </p:txBody>
-      </p:sp>
-      <p:sp>
-        <p:nvSpPr>
-          <p:cNvPr id="6" name="TextBox 5"/>
+              <a:t>Exporta tambien la imagen a la carpeta de tu Proyecto Integrador. Esa copia es para tu informe; no reemplaza la respuesta en la plataforma.</a:t>
+            </a:r>
+          </a:p>
+        </p:txBody>
+      </p:sp>
+      <p:sp>
+        <p:nvSpPr>
+          <p:cNvPr id="22" name="TextBox 21"/>
           <p:cNvSpPr txBox="1"/>
           <p:nvPr/>
         </p:nvSpPr>
@@ -9796,7 +10816,7 @@
                 </a:solidFill>
                 <a:latin typeface="Calibri"/>
               </a:rPr>
-              <a:t>Taller PI VetCare — objetivo y criterios</a:t>
+              <a:t>Taller PI VetCare — contexto / por que importa</a:t>
             </a:r>
           </a:p>
         </p:txBody>
@@ -9829,7 +10849,7 @@
               </a:spcAft>
             </a:pPr>
             <a:r>
-              <a:rPr sz="1500" b="0" i="0">
+              <a:rPr sz="1600" b="0" i="0">
                 <a:solidFill>
                   <a:srgbClr val="333333"/>
                 </a:solidFill>
@@ -9838,22 +10858,22 @@
               <a:t>–   </a:t>
             </a:r>
             <a:r>
-              <a:rPr sz="1500" b="1" i="0">
+              <a:rPr sz="1600" b="1" i="0">
                 <a:solidFill>
                   <a:srgbClr val="333333"/>
                 </a:solidFill>
                 <a:latin typeface="Calibri"/>
               </a:rPr>
-              <a:t>Objetivo:</a:t>
-            </a:r>
-            <a:r>
-              <a:rPr sz="1500" b="0" i="0">
+              <a:t>Por qué importa al PI:</a:t>
+            </a:r>
+            <a:r>
+              <a:rPr sz="1600" b="0" i="0">
                 <a:solidFill>
                   <a:srgbClr val="333333"/>
                 </a:solidFill>
                 <a:latin typeface="Calibri"/>
               </a:rPr>
-              <a:t> Contrato &gt;=3 ops + outline pitch 5-8 min.</a:t>
+              <a:t> app llama contrato, no SQL suelto.</a:t>
             </a:r>
           </a:p>
           <a:p>
@@ -9863,133 +10883,13 @@
               </a:spcAft>
             </a:pPr>
             <a:r>
-              <a:rPr sz="1500" b="0" i="0">
+              <a:rPr sz="1600" b="0" i="0">
                 <a:solidFill>
                   <a:srgbClr val="333333"/>
                 </a:solidFill>
                 <a:latin typeface="Calibri"/>
               </a:rPr>
-              <a:t>–   </a:t>
-            </a:r>
-            <a:r>
-              <a:rPr sz="1500" b="1" i="0">
-                <a:solidFill>
-                  <a:srgbClr val="333333"/>
-                </a:solidFill>
-                <a:latin typeface="Calibri"/>
-              </a:rPr>
-              <a:t>Exito:</a:t>
-            </a:r>
-            <a:r>
-              <a:rPr sz="1500" b="0" i="0">
-                <a:solidFill>
-                  <a:srgbClr val="333333"/>
-                </a:solidFill>
-                <a:latin typeface="Calibri"/>
-              </a:rPr>
-              <a:t> Contrato 3 ops.</a:t>
-            </a:r>
-          </a:p>
-          <a:p>
-            <a:pPr>
-              <a:spcAft>
-                <a:spcPts val="800"/>
-              </a:spcAft>
-            </a:pPr>
-            <a:r>
-              <a:rPr sz="1500" b="0" i="0">
-                <a:solidFill>
-                  <a:srgbClr val="333333"/>
-                </a:solidFill>
-                <a:latin typeface="Calibri"/>
-              </a:rPr>
-              <a:t>–   </a:t>
-            </a:r>
-            <a:r>
-              <a:rPr sz="1500" b="1" i="0">
-                <a:solidFill>
-                  <a:srgbClr val="333333"/>
-                </a:solidFill>
-                <a:latin typeface="Calibri"/>
-              </a:rPr>
-              <a:t>Exito:</a:t>
-            </a:r>
-            <a:r>
-              <a:rPr sz="1500" b="0" i="0">
-                <a:solidFill>
-                  <a:srgbClr val="333333"/>
-                </a:solidFill>
-                <a:latin typeface="Calibri"/>
-              </a:rPr>
-              <a:t> Parametros/errores/ejemplo.</a:t>
-            </a:r>
-          </a:p>
-          <a:p>
-            <a:pPr>
-              <a:spcAft>
-                <a:spcPts val="800"/>
-              </a:spcAft>
-            </a:pPr>
-            <a:r>
-              <a:rPr sz="1500" b="0" i="0">
-                <a:solidFill>
-                  <a:srgbClr val="333333"/>
-                </a:solidFill>
-                <a:latin typeface="Calibri"/>
-              </a:rPr>
-              <a:t>–   </a:t>
-            </a:r>
-            <a:r>
-              <a:rPr sz="1500" b="1" i="0">
-                <a:solidFill>
-                  <a:srgbClr val="333333"/>
-                </a:solidFill>
-                <a:latin typeface="Calibri"/>
-              </a:rPr>
-              <a:t>Exito:</a:t>
-            </a:r>
-            <a:r>
-              <a:rPr sz="1500" b="0" i="0">
-                <a:solidFill>
-                  <a:srgbClr val="333333"/>
-                </a:solidFill>
-                <a:latin typeface="Calibri"/>
-              </a:rPr>
-              <a:t> Outline pitch.</a:t>
-            </a:r>
-          </a:p>
-          <a:p>
-            <a:pPr>
-              <a:spcAft>
-                <a:spcPts val="800"/>
-              </a:spcAft>
-            </a:pPr>
-            <a:r>
-              <a:rPr sz="1500" b="0" i="0">
-                <a:solidFill>
-                  <a:srgbClr val="333333"/>
-                </a:solidFill>
-                <a:latin typeface="Calibri"/>
-              </a:rPr>
-              <a:t>–   </a:t>
-            </a:r>
-            <a:r>
-              <a:rPr sz="1500" b="1" i="0">
-                <a:solidFill>
-                  <a:srgbClr val="333333"/>
-                </a:solidFill>
-                <a:latin typeface="Calibri"/>
-              </a:rPr>
-              <a:t>Exito:</a:t>
-            </a:r>
-            <a:r>
-              <a:rPr sz="1500" b="0" i="0">
-                <a:solidFill>
-                  <a:srgbClr val="333333"/>
-                </a:solidFill>
-                <a:latin typeface="Calibri"/>
-              </a:rPr>
-              <a:t> Borrador final.</a:t>
+              <a:t>–   Preparar sustentacion.</a:t>
             </a:r>
           </a:p>
         </p:txBody>

--- a/Bases de Datos II/Clases/Clase 12 - Integracion y preparacion final/Presentacion.pptx
+++ b/Bases de Datos II/Clases/Clase 12 - Integracion y preparacion final/Presentacion.pptx
@@ -5765,7 +5765,23 @@
                 </a:solidFill>
                 <a:latin typeface="Calibri"/>
               </a:rPr>
-              <a:t>–   Evidencia en playground (enlace) o archivo SQL/PNG propio.</a:t>
+              <a:t>–   Evidencia: el SQL y su salida quedan guardados en cada pregunta de ExamLab.</a:t>
+            </a:r>
+          </a:p>
+          <a:p>
+            <a:pPr>
+              <a:spcAft>
+                <a:spcPts val="800"/>
+              </a:spcAft>
+            </a:pPr>
+            <a:r>
+              <a:rPr sz="1600" b="0" i="0">
+                <a:solidFill>
+                  <a:srgbClr val="333333"/>
+                </a:solidFill>
+                <a:latin typeface="Calibri"/>
+              </a:rPr>
+              <a:t>–   Conserva copia en tu carpeta del PI (los .sql que pide el entregable).</a:t>
             </a:r>
           </a:p>
           <a:p>

--- a/Bases de Datos II/Clases/Clase 12 - Integracion y preparacion final/Presentacion.pptx
+++ b/Bases de Datos II/Clases/Clase 12 - Integracion y preparacion final/Presentacion.pptx
@@ -3654,7 +3654,7 @@
               </a:spcAft>
             </a:pPr>
             <a:r>
-              <a:rPr sz="1500" b="0" i="0">
+              <a:rPr sz="2000" b="0" i="0">
                 <a:solidFill>
                   <a:srgbClr val="333333"/>
                 </a:solidFill>
@@ -3663,7 +3663,7 @@
               <a:t>–   </a:t>
             </a:r>
             <a:r>
-              <a:rPr sz="1500" b="1" i="0">
+              <a:rPr sz="2000" b="1" i="0">
                 <a:solidFill>
                   <a:srgbClr val="333333"/>
                 </a:solidFill>
@@ -3672,7 +3672,7 @@
               <a:t>Objetivo:</a:t>
             </a:r>
             <a:r>
-              <a:rPr sz="1500" b="0" i="0">
+              <a:rPr sz="2000" b="0" i="0">
                 <a:solidFill>
                   <a:srgbClr val="333333"/>
                 </a:solidFill>
@@ -3688,7 +3688,7 @@
               </a:spcAft>
             </a:pPr>
             <a:r>
-              <a:rPr sz="1500" b="0" i="0">
+              <a:rPr sz="2000" b="0" i="0">
                 <a:solidFill>
                   <a:srgbClr val="333333"/>
                 </a:solidFill>
@@ -3697,7 +3697,7 @@
               <a:t>–   </a:t>
             </a:r>
             <a:r>
-              <a:rPr sz="1500" b="1" i="0">
+              <a:rPr sz="2000" b="1" i="0">
                 <a:solidFill>
                   <a:srgbClr val="333333"/>
                 </a:solidFill>
@@ -3706,7 +3706,7 @@
               <a:t>Exito:</a:t>
             </a:r>
             <a:r>
-              <a:rPr sz="1500" b="0" i="0">
+              <a:rPr sz="2000" b="0" i="0">
                 <a:solidFill>
                   <a:srgbClr val="333333"/>
                 </a:solidFill>
@@ -3722,7 +3722,7 @@
               </a:spcAft>
             </a:pPr>
             <a:r>
-              <a:rPr sz="1500" b="0" i="0">
+              <a:rPr sz="2000" b="0" i="0">
                 <a:solidFill>
                   <a:srgbClr val="333333"/>
                 </a:solidFill>
@@ -3731,7 +3731,7 @@
               <a:t>–   </a:t>
             </a:r>
             <a:r>
-              <a:rPr sz="1500" b="1" i="0">
+              <a:rPr sz="2000" b="1" i="0">
                 <a:solidFill>
                   <a:srgbClr val="333333"/>
                 </a:solidFill>
@@ -3740,7 +3740,7 @@
               <a:t>Exito:</a:t>
             </a:r>
             <a:r>
-              <a:rPr sz="1500" b="0" i="0">
+              <a:rPr sz="2000" b="0" i="0">
                 <a:solidFill>
                   <a:srgbClr val="333333"/>
                 </a:solidFill>
@@ -3756,7 +3756,7 @@
               </a:spcAft>
             </a:pPr>
             <a:r>
-              <a:rPr sz="1500" b="0" i="0">
+              <a:rPr sz="2000" b="0" i="0">
                 <a:solidFill>
                   <a:srgbClr val="333333"/>
                 </a:solidFill>
@@ -3765,7 +3765,7 @@
               <a:t>–   </a:t>
             </a:r>
             <a:r>
-              <a:rPr sz="1500" b="1" i="0">
+              <a:rPr sz="2000" b="1" i="0">
                 <a:solidFill>
                   <a:srgbClr val="333333"/>
                 </a:solidFill>
@@ -3774,7 +3774,7 @@
               <a:t>Exito:</a:t>
             </a:r>
             <a:r>
-              <a:rPr sz="1500" b="0" i="0">
+              <a:rPr sz="2000" b="0" i="0">
                 <a:solidFill>
                   <a:srgbClr val="333333"/>
                 </a:solidFill>
@@ -3790,7 +3790,7 @@
               </a:spcAft>
             </a:pPr>
             <a:r>
-              <a:rPr sz="1500" b="0" i="0">
+              <a:rPr sz="2000" b="0" i="0">
                 <a:solidFill>
                   <a:srgbClr val="333333"/>
                 </a:solidFill>
@@ -3799,7 +3799,7 @@
               <a:t>–   </a:t>
             </a:r>
             <a:r>
-              <a:rPr sz="1500" b="1" i="0">
+              <a:rPr sz="2000" b="1" i="0">
                 <a:solidFill>
                   <a:srgbClr val="333333"/>
                 </a:solidFill>
@@ -3808,7 +3808,7 @@
               <a:t>Exito:</a:t>
             </a:r>
             <a:r>
-              <a:rPr sz="1500" b="0" i="0">
+              <a:rPr sz="2000" b="0" i="0">
                 <a:solidFill>
                   <a:srgbClr val="333333"/>
                 </a:solidFill>
@@ -4028,7 +4028,7 @@
               </a:spcAft>
             </a:pPr>
             <a:r>
-              <a:rPr sz="1600" b="0" i="0">
+              <a:rPr sz="2000" b="0" i="0">
                 <a:solidFill>
                   <a:srgbClr val="333333"/>
                 </a:solidFill>
@@ -5725,7 +5725,7 @@
               </a:spcAft>
             </a:pPr>
             <a:r>
-              <a:rPr sz="1600" b="0" i="0">
+              <a:rPr sz="2000" b="0" i="0">
                 <a:solidFill>
                   <a:srgbClr val="333333"/>
                 </a:solidFill>
@@ -5734,7 +5734,7 @@
               <a:t>–   </a:t>
             </a:r>
             <a:r>
-              <a:rPr sz="1600" b="1" i="0">
+              <a:rPr sz="2000" b="1" i="0">
                 <a:solidFill>
                   <a:srgbClr val="333333"/>
                 </a:solidFill>
@@ -5743,7 +5743,7 @@
               <a:t>Entregable:</a:t>
             </a:r>
             <a:r>
-              <a:rPr sz="1600" b="0" i="0">
+              <a:rPr sz="2000" b="0" i="0">
                 <a:solidFill>
                   <a:srgbClr val="333333"/>
                 </a:solidFill>
@@ -5759,7 +5759,7 @@
               </a:spcAft>
             </a:pPr>
             <a:r>
-              <a:rPr sz="1600" b="0" i="0">
+              <a:rPr sz="2000" b="0" i="0">
                 <a:solidFill>
                   <a:srgbClr val="333333"/>
                 </a:solidFill>
@@ -5775,7 +5775,7 @@
               </a:spcAft>
             </a:pPr>
             <a:r>
-              <a:rPr sz="1600" b="0" i="0">
+              <a:rPr sz="2000" b="0" i="0">
                 <a:solidFill>
                   <a:srgbClr val="333333"/>
                 </a:solidFill>
@@ -5791,7 +5791,7 @@
               </a:spcAft>
             </a:pPr>
             <a:r>
-              <a:rPr sz="1600" b="0" i="0">
+              <a:rPr sz="2000" b="0" i="0">
                 <a:solidFill>
                   <a:srgbClr val="333333"/>
                 </a:solidFill>
@@ -5807,7 +5807,7 @@
               </a:spcAft>
             </a:pPr>
             <a:r>
-              <a:rPr sz="1600" b="0" i="0">
+              <a:rPr sz="2000" b="0" i="0">
                 <a:solidFill>
                   <a:srgbClr val="333333"/>
                 </a:solidFill>
@@ -5816,7 +5816,7 @@
               <a:t>–   </a:t>
             </a:r>
             <a:r>
-              <a:rPr sz="1600" b="1" i="0">
+              <a:rPr sz="2000" b="1" i="0">
                 <a:solidFill>
                   <a:srgbClr val="333333"/>
                 </a:solidFill>
@@ -5825,7 +5825,7 @@
               <a:t>Entrega en ExamLab</a:t>
             </a:r>
             <a:r>
-              <a:rPr sz="1600" b="0" i="0">
+              <a:rPr sz="2000" b="0" i="0">
                 <a:solidFill>
                   <a:srgbClr val="333333"/>
                 </a:solidFill>
@@ -6872,7 +6872,7 @@
               </a:spcAft>
             </a:pPr>
             <a:r>
-              <a:rPr sz="1600" b="0" i="0">
+              <a:rPr sz="2000" b="0" i="0">
                 <a:solidFill>
                   <a:srgbClr val="333333"/>
                 </a:solidFill>
@@ -6881,7 +6881,7 @@
               <a:t>–   </a:t>
             </a:r>
             <a:r>
-              <a:rPr sz="1600" b="1" i="0">
+              <a:rPr sz="2000" b="1" i="0">
                 <a:solidFill>
                   <a:srgbClr val="333333"/>
                 </a:solidFill>
@@ -6890,7 +6890,7 @@
               <a:t>Hoy avanzamos el PI en:</a:t>
             </a:r>
             <a:r>
-              <a:rPr sz="1600" b="0" i="0">
+              <a:rPr sz="2000" b="0" i="0">
                 <a:solidFill>
                   <a:srgbClr val="333333"/>
                 </a:solidFill>
@@ -6906,7 +6906,7 @@
               </a:spcAft>
             </a:pPr>
             <a:r>
-              <a:rPr sz="1600" b="0" i="0">
+              <a:rPr sz="2000" b="0" i="0">
                 <a:solidFill>
                   <a:srgbClr val="333333"/>
                 </a:solidFill>
@@ -6915,7 +6915,7 @@
               <a:t>–   Herramienta: </a:t>
             </a:r>
             <a:r>
-              <a:rPr sz="1600" b="1" i="0">
+              <a:rPr sz="2000" b="1" i="0">
                 <a:solidFill>
                   <a:srgbClr val="333333"/>
                 </a:solidFill>
@@ -6924,7 +6924,7 @@
               <a:t>Google Docs + Live SQL + Excalidraw</a:t>
             </a:r>
             <a:r>
-              <a:rPr sz="1600" b="0" i="0">
+              <a:rPr sz="2000" b="0" i="0">
                 <a:solidFill>
                   <a:srgbClr val="333333"/>
                 </a:solidFill>
@@ -6933,7 +6933,7 @@
               <a:t> · Bloque </a:t>
             </a:r>
             <a:r>
-              <a:rPr sz="1600" b="1" i="0">
+              <a:rPr sz="2000" b="1" i="0">
                 <a:solidFill>
                   <a:srgbClr val="333333"/>
                 </a:solidFill>
@@ -6942,7 +6942,7 @@
               <a:t>120 min</a:t>
             </a:r>
             <a:r>
-              <a:rPr sz="1600" b="0" i="0">
+              <a:rPr sz="2000" b="0" i="0">
                 <a:solidFill>
                   <a:srgbClr val="333333"/>
                 </a:solidFill>
@@ -6958,7 +6958,7 @@
               </a:spcAft>
             </a:pPr>
             <a:r>
-              <a:rPr sz="1600" b="0" i="0">
+              <a:rPr sz="2000" b="0" i="0">
                 <a:solidFill>
                   <a:srgbClr val="333333"/>
                 </a:solidFill>
@@ -6967,7 +6967,7 @@
               <a:t>–   </a:t>
             </a:r>
             <a:r>
-              <a:rPr sz="1600" b="1" i="0">
+              <a:rPr sz="2000" b="1" i="0">
                 <a:solidFill>
                   <a:srgbClr val="333333"/>
                 </a:solidFill>
@@ -6976,7 +6976,7 @@
               <a:t>Entregable de hoy:</a:t>
             </a:r>
             <a:r>
-              <a:rPr sz="1600" b="0" i="0">
+              <a:rPr sz="2000" b="0" i="0">
                 <a:solidFill>
                   <a:srgbClr val="333333"/>
                 </a:solidFill>
@@ -6992,7 +6992,7 @@
               </a:spcAft>
             </a:pPr>
             <a:r>
-              <a:rPr sz="1600" b="0" i="0">
+              <a:rPr sz="2000" b="0" i="0">
                 <a:solidFill>
                   <a:srgbClr val="333333"/>
                 </a:solidFill>
@@ -7008,7 +7008,7 @@
               </a:spcAft>
             </a:pPr>
             <a:r>
-              <a:rPr sz="1600" b="0" i="0">
+              <a:rPr sz="2000" b="0" i="0">
                 <a:solidFill>
                   <a:srgbClr val="333333"/>
                 </a:solidFill>
@@ -7024,7 +7024,7 @@
               </a:spcAft>
             </a:pPr>
             <a:r>
-              <a:rPr sz="1600" b="0" i="0">
+              <a:rPr sz="2000" b="0" i="0">
                 <a:solidFill>
                   <a:srgbClr val="333333"/>
                 </a:solidFill>
@@ -7348,7 +7348,7 @@
         <p:spPr>
           <a:xfrm>
             <a:off x="502920" y="2587752"/>
-            <a:ext cx="2164019" cy="2560320"/>
+            <a:ext cx="2164019" cy="3310128"/>
           </a:xfrm>
           <a:prstGeom prst="rect">
             <a:avLst/>
@@ -7463,7 +7463,7 @@
         <p:spPr>
           <a:xfrm>
             <a:off x="2758379" y="2587752"/>
-            <a:ext cx="2164019" cy="2560320"/>
+            <a:ext cx="2164019" cy="3310128"/>
           </a:xfrm>
           <a:prstGeom prst="rect">
             <a:avLst/>
@@ -7578,7 +7578,7 @@
         <p:spPr>
           <a:xfrm>
             <a:off x="5013838" y="2587752"/>
-            <a:ext cx="2164019" cy="2560320"/>
+            <a:ext cx="2164019" cy="3310128"/>
           </a:xfrm>
           <a:prstGeom prst="rect">
             <a:avLst/>
@@ -7693,7 +7693,7 @@
         <p:spPr>
           <a:xfrm>
             <a:off x="7269297" y="2587752"/>
-            <a:ext cx="2164019" cy="2560320"/>
+            <a:ext cx="2164019" cy="3310128"/>
           </a:xfrm>
           <a:prstGeom prst="rect">
             <a:avLst/>
@@ -7808,7 +7808,7 @@
         <p:spPr>
           <a:xfrm>
             <a:off x="9524756" y="2587752"/>
-            <a:ext cx="2164019" cy="2560320"/>
+            <a:ext cx="2164019" cy="3310128"/>
           </a:xfrm>
           <a:prstGeom prst="rect">
             <a:avLst/>
@@ -7842,8 +7842,8 @@
         </p:nvSpPr>
         <p:spPr>
           <a:xfrm>
-            <a:off x="457200" y="5943600"/>
-            <a:ext cx="11277295" cy="365760"/>
+            <a:off x="457200" y="5806440"/>
+            <a:ext cx="11277295" cy="640080"/>
           </a:xfrm>
           <a:prstGeom prst="rect">
             <a:avLst/>
@@ -8096,7 +8096,7 @@
               </a:spcAft>
             </a:pPr>
             <a:r>
-              <a:rPr sz="1500" b="0" i="0">
+              <a:rPr sz="2000" b="0" i="0">
                 <a:solidFill>
                   <a:srgbClr val="333333"/>
                 </a:solidFill>
@@ -8112,7 +8112,7 @@
               </a:spcAft>
             </a:pPr>
             <a:r>
-              <a:rPr sz="1500" b="0" i="0">
+              <a:rPr sz="2000" b="0" i="0">
                 <a:solidFill>
                   <a:srgbClr val="333333"/>
                 </a:solidFill>
@@ -8128,7 +8128,7 @@
               </a:spcAft>
             </a:pPr>
             <a:r>
-              <a:rPr sz="1500" b="0" i="0">
+              <a:rPr sz="2000" b="0" i="0">
                 <a:solidFill>
                   <a:srgbClr val="333333"/>
                 </a:solidFill>
@@ -8144,7 +8144,7 @@
               </a:spcAft>
             </a:pPr>
             <a:r>
-              <a:rPr sz="1500" b="0" i="0">
+              <a:rPr sz="2000" b="0" i="0">
                 <a:solidFill>
                   <a:srgbClr val="333333"/>
                 </a:solidFill>
@@ -8160,7 +8160,7 @@
               </a:spcAft>
             </a:pPr>
             <a:r>
-              <a:rPr sz="1500" b="0" i="0">
+              <a:rPr sz="2000" b="0" i="0">
                 <a:solidFill>
                   <a:srgbClr val="333333"/>
                 </a:solidFill>
@@ -8835,7 +8835,7 @@
               </a:spcAft>
             </a:pPr>
             <a:r>
-              <a:rPr sz="1600" b="0" i="0">
+              <a:rPr sz="2000" b="0" i="0">
                 <a:solidFill>
                   <a:srgbClr val="333333"/>
                 </a:solidFill>
@@ -8844,7 +8844,7 @@
               <a:t>–   </a:t>
             </a:r>
             <a:r>
-              <a:rPr sz="1600" b="1" i="0">
+              <a:rPr sz="2000" b="1" i="0">
                 <a:solidFill>
                   <a:srgbClr val="333333"/>
                 </a:solidFill>
@@ -8853,7 +8853,7 @@
               <a:t>Herramienta:</a:t>
             </a:r>
             <a:r>
-              <a:rPr sz="1600" b="0" i="0">
+              <a:rPr sz="2000" b="0" i="0">
                 <a:solidFill>
                   <a:srgbClr val="333333"/>
                 </a:solidFill>
@@ -8869,7 +8869,7 @@
               </a:spcAft>
             </a:pPr>
             <a:r>
-              <a:rPr sz="1600" b="0" i="0">
+              <a:rPr sz="2000" b="0" i="0">
                 <a:solidFill>
                   <a:srgbClr val="333333"/>
                 </a:solidFill>
@@ -8878,7 +8878,7 @@
               <a:t>–   </a:t>
             </a:r>
             <a:r>
-              <a:rPr sz="1600" b="1" i="0">
+              <a:rPr sz="2000" b="1" i="0">
                 <a:solidFill>
                   <a:srgbClr val="333333"/>
                 </a:solidFill>
@@ -8887,7 +8887,7 @@
               <a:t>Demo:</a:t>
             </a:r>
             <a:r>
-              <a:rPr sz="1600" b="0" i="0">
+              <a:rPr sz="2000" b="0" i="0">
                 <a:solidFill>
                   <a:srgbClr val="333333"/>
                 </a:solidFill>
@@ -8903,7 +8903,7 @@
               </a:spcAft>
             </a:pPr>
             <a:r>
-              <a:rPr sz="1600" b="0" i="0">
+              <a:rPr sz="2000" b="0" i="0">
                 <a:solidFill>
                   <a:srgbClr val="333333"/>
                 </a:solidFill>
@@ -8919,7 +8919,7 @@
               </a:spcAft>
             </a:pPr>
             <a:r>
-              <a:rPr sz="1600" b="0" i="0">
+              <a:rPr sz="2000" b="0" i="0">
                 <a:solidFill>
                   <a:srgbClr val="333333"/>
                 </a:solidFill>
@@ -10865,7 +10865,7 @@
               </a:spcAft>
             </a:pPr>
             <a:r>
-              <a:rPr sz="1600" b="0" i="0">
+              <a:rPr sz="2000" b="0" i="0">
                 <a:solidFill>
                   <a:srgbClr val="333333"/>
                 </a:solidFill>
@@ -10874,7 +10874,7 @@
               <a:t>–   </a:t>
             </a:r>
             <a:r>
-              <a:rPr sz="1600" b="1" i="0">
+              <a:rPr sz="2000" b="1" i="0">
                 <a:solidFill>
                   <a:srgbClr val="333333"/>
                 </a:solidFill>
@@ -10883,7 +10883,7 @@
               <a:t>Por qué importa al PI:</a:t>
             </a:r>
             <a:r>
-              <a:rPr sz="1600" b="0" i="0">
+              <a:rPr sz="2000" b="0" i="0">
                 <a:solidFill>
                   <a:srgbClr val="333333"/>
                 </a:solidFill>
@@ -10899,7 +10899,7 @@
               </a:spcAft>
             </a:pPr>
             <a:r>
-              <a:rPr sz="1600" b="0" i="0">
+              <a:rPr sz="2000" b="0" i="0">
                 <a:solidFill>
                   <a:srgbClr val="333333"/>
                 </a:solidFill>

--- a/Bases de Datos II/Clases/Clase 12 - Integracion y preparacion final/Presentacion.pptx
+++ b/Bases de Datos II/Clases/Clase 12 - Integracion y preparacion final/Presentacion.pptx
@@ -5765,7 +5765,7 @@
                 </a:solidFill>
                 <a:latin typeface="Calibri"/>
               </a:rPr>
-              <a:t>–   Evidencia: el SQL y su salida quedan guardados en cada pregunta de ExamLab.</a:t>
+              <a:t>–   Evidencia: el SQL y su salida quedan guardados en cada pregunta de la plataforma del curso.</a:t>
             </a:r>
           </a:p>
           <a:p>
@@ -5822,7 +5822,7 @@
                 </a:solidFill>
                 <a:latin typeface="Calibri"/>
               </a:rPr>
-              <a:t>Entrega en ExamLab</a:t>
+              <a:t>Entrega en la plataforma del curso</a:t>
             </a:r>
             <a:r>
               <a:rPr sz="2000" b="0" i="0">
@@ -5831,7 +5831,7 @@
                 </a:solidFill>
                 <a:latin typeface="Calibri"/>
               </a:rPr>
-              <a:t> (https://uniaj.examlab.workers.dev/) — domingo 23:59 cuando aplique taller.</a:t>
+              <a:t> — en la fecha que indique el docente.</a:t>
             </a:r>
           </a:p>
         </p:txBody>
@@ -6426,7 +6426,7 @@
                 </a:solidFill>
                 <a:latin typeface="Calibri"/>
               </a:rPr>
-              <a:t>Taller de la semana en ExamLab (https://uniaj.examlab.workers.dev/): domingo 23:59 (regla del Acuerdo) cuando aplique.</a:t>
+              <a:t>Si el docente asigna taller esta semana, él indica el canal y la fecha.</a:t>
             </a:r>
           </a:p>
         </p:txBody>
@@ -9933,7 +9933,7 @@
                 </a:solidFill>
                 <a:latin typeface="Calibri"/>
               </a:rPr>
-              <a:t>Del boceto a ExamLab (diagrama)</a:t>
+              <a:t>Del boceto a la plataforma del curso (diagrama)</a:t>
             </a:r>
           </a:p>
         </p:txBody>
@@ -9967,7 +9967,7 @@
                 </a:solidFill>
                 <a:latin typeface="Calibri"/>
               </a:rPr>
-              <a:t>El diagrama se entrega como codigo Mermaid dentro de ExamLab, no como imagen</a:t>
+              <a:t>El diagrama se entrega como codigo Mermaid dentro de la plataforma del curso, no como imagen</a:t>
             </a:r>
           </a:p>
         </p:txBody>
@@ -10464,7 +10464,7 @@
                 </a:solidFill>
                 <a:latin typeface="Calibri"/>
               </a:rPr>
-              <a:t>Pega y renderiza en ExamLab</a:t>
+              <a:t>Pega y renderiza en la plataforma del curso</a:t>
             </a:r>
           </a:p>
           <a:p>
@@ -10480,7 +10480,7 @@
                 </a:solidFill>
                 <a:latin typeface="Calibri"/>
               </a:rPr>
-              <a:t>Pega ese codigo en la caja de texto de la pregunta y mira como lo dibuja la plataforma. Si no renderiza, corrige ahi mismo: lo que se califica es el diagrama renderizado dentro de ExamLab.</a:t>
+              <a:t>Pega ese codigo en la caja de texto de la pregunta y mira como lo dibuja la plataforma. Si no renderiza, corrige ahi mismo: lo que se califica es el diagrama renderizado dentro de la plataforma del curso.</a:t>
             </a:r>
           </a:p>
         </p:txBody>
